--- a/CMP/slides/Lecture-4.pptx
+++ b/CMP/slides/Lecture-4.pptx
@@ -5,7 +5,7 @@
     <p:sldMasterId id="2147483648" r:id="rId1"/>
   </p:sldMasterIdLst>
   <p:notesMasterIdLst>
-    <p:notesMasterId r:id="rId58"/>
+    <p:notesMasterId r:id="rId59"/>
   </p:notesMasterIdLst>
   <p:sldIdLst>
     <p:sldId id="256" r:id="rId2"/>
@@ -32,38 +32,39 @@
     <p:sldId id="409" r:id="rId23"/>
     <p:sldId id="531" r:id="rId24"/>
     <p:sldId id="410" r:id="rId25"/>
-    <p:sldId id="401" r:id="rId26"/>
-    <p:sldId id="411" r:id="rId27"/>
-    <p:sldId id="402" r:id="rId28"/>
-    <p:sldId id="412" r:id="rId29"/>
-    <p:sldId id="413" r:id="rId30"/>
-    <p:sldId id="414" r:id="rId31"/>
-    <p:sldId id="415" r:id="rId32"/>
-    <p:sldId id="440" r:id="rId33"/>
-    <p:sldId id="441" r:id="rId34"/>
-    <p:sldId id="416" r:id="rId35"/>
-    <p:sldId id="417" r:id="rId36"/>
-    <p:sldId id="442" r:id="rId37"/>
-    <p:sldId id="420" r:id="rId38"/>
-    <p:sldId id="443" r:id="rId39"/>
-    <p:sldId id="421" r:id="rId40"/>
-    <p:sldId id="422" r:id="rId41"/>
-    <p:sldId id="423" r:id="rId42"/>
-    <p:sldId id="444" r:id="rId43"/>
-    <p:sldId id="435" r:id="rId44"/>
-    <p:sldId id="454" r:id="rId45"/>
-    <p:sldId id="436" r:id="rId46"/>
-    <p:sldId id="445" r:id="rId47"/>
-    <p:sldId id="437" r:id="rId48"/>
-    <p:sldId id="438" r:id="rId49"/>
-    <p:sldId id="439" r:id="rId50"/>
-    <p:sldId id="447" r:id="rId51"/>
-    <p:sldId id="341" r:id="rId52"/>
-    <p:sldId id="418" r:id="rId53"/>
-    <p:sldId id="520" r:id="rId54"/>
-    <p:sldId id="524" r:id="rId55"/>
-    <p:sldId id="525" r:id="rId56"/>
-    <p:sldId id="426" r:id="rId57"/>
+    <p:sldId id="538" r:id="rId26"/>
+    <p:sldId id="401" r:id="rId27"/>
+    <p:sldId id="411" r:id="rId28"/>
+    <p:sldId id="402" r:id="rId29"/>
+    <p:sldId id="412" r:id="rId30"/>
+    <p:sldId id="413" r:id="rId31"/>
+    <p:sldId id="414" r:id="rId32"/>
+    <p:sldId id="415" r:id="rId33"/>
+    <p:sldId id="440" r:id="rId34"/>
+    <p:sldId id="441" r:id="rId35"/>
+    <p:sldId id="416" r:id="rId36"/>
+    <p:sldId id="417" r:id="rId37"/>
+    <p:sldId id="442" r:id="rId38"/>
+    <p:sldId id="420" r:id="rId39"/>
+    <p:sldId id="443" r:id="rId40"/>
+    <p:sldId id="421" r:id="rId41"/>
+    <p:sldId id="422" r:id="rId42"/>
+    <p:sldId id="423" r:id="rId43"/>
+    <p:sldId id="444" r:id="rId44"/>
+    <p:sldId id="435" r:id="rId45"/>
+    <p:sldId id="454" r:id="rId46"/>
+    <p:sldId id="436" r:id="rId47"/>
+    <p:sldId id="445" r:id="rId48"/>
+    <p:sldId id="437" r:id="rId49"/>
+    <p:sldId id="438" r:id="rId50"/>
+    <p:sldId id="439" r:id="rId51"/>
+    <p:sldId id="447" r:id="rId52"/>
+    <p:sldId id="341" r:id="rId53"/>
+    <p:sldId id="418" r:id="rId54"/>
+    <p:sldId id="520" r:id="rId55"/>
+    <p:sldId id="524" r:id="rId56"/>
+    <p:sldId id="525" r:id="rId57"/>
+    <p:sldId id="426" r:id="rId58"/>
   </p:sldIdLst>
   <p:sldSz cx="12192000" cy="6858000"/>
   <p:notesSz cx="6858000" cy="9144000"/>
@@ -3996,7 +3997,7 @@
           <a:p>
             <a:fld id="{3B9F7541-8AA1-4873-8EE2-6EE4B745E30A}" type="datetimeFigureOut">
               <a:rPr lang="en-IN" smtClean="0"/>
-              <a:t>12-09-2022</a:t>
+              <a:t>23-01-2024</a:t>
             </a:fld>
             <a:endParaRPr lang="en-IN"/>
           </a:p>
@@ -5841,7 +5842,7 @@
           <a:p>
             <a:fld id="{D118A67C-CD00-4FBA-89AB-9ABCAF3D8767}" type="slidenum">
               <a:rPr lang="en-IN" smtClean="0"/>
-              <a:t>25</a:t>
+              <a:t>26</a:t>
             </a:fld>
             <a:endParaRPr lang="en-IN"/>
           </a:p>
@@ -5929,7 +5930,7 @@
           <a:p>
             <a:fld id="{D118A67C-CD00-4FBA-89AB-9ABCAF3D8767}" type="slidenum">
               <a:rPr lang="en-IN" smtClean="0"/>
-              <a:t>26</a:t>
+              <a:t>27</a:t>
             </a:fld>
             <a:endParaRPr lang="en-IN"/>
           </a:p>
@@ -6013,7 +6014,7 @@
           <a:p>
             <a:fld id="{D118A67C-CD00-4FBA-89AB-9ABCAF3D8767}" type="slidenum">
               <a:rPr lang="en-IN" smtClean="0"/>
-              <a:t>27</a:t>
+              <a:t>28</a:t>
             </a:fld>
             <a:endParaRPr lang="en-IN"/>
           </a:p>
@@ -6101,7 +6102,7 @@
           <a:p>
             <a:fld id="{D118A67C-CD00-4FBA-89AB-9ABCAF3D8767}" type="slidenum">
               <a:rPr lang="en-IN" smtClean="0"/>
-              <a:t>28</a:t>
+              <a:t>29</a:t>
             </a:fld>
             <a:endParaRPr lang="en-IN"/>
           </a:p>
@@ -6185,7 +6186,7 @@
           <a:p>
             <a:fld id="{D118A67C-CD00-4FBA-89AB-9ABCAF3D8767}" type="slidenum">
               <a:rPr lang="en-IN" smtClean="0"/>
-              <a:t>29</a:t>
+              <a:t>30</a:t>
             </a:fld>
             <a:endParaRPr lang="en-IN"/>
           </a:p>
@@ -6353,7 +6354,7 @@
           <a:p>
             <a:fld id="{D118A67C-CD00-4FBA-89AB-9ABCAF3D8767}" type="slidenum">
               <a:rPr lang="en-IN" smtClean="0"/>
-              <a:t>30</a:t>
+              <a:t>31</a:t>
             </a:fld>
             <a:endParaRPr lang="en-IN"/>
           </a:p>
@@ -6437,7 +6438,7 @@
           <a:p>
             <a:fld id="{D118A67C-CD00-4FBA-89AB-9ABCAF3D8767}" type="slidenum">
               <a:rPr lang="en-IN" smtClean="0"/>
-              <a:t>31</a:t>
+              <a:t>32</a:t>
             </a:fld>
             <a:endParaRPr lang="en-IN"/>
           </a:p>
@@ -6542,7 +6543,7 @@
           <a:p>
             <a:fld id="{941CD276-996C-461A-BA18-C0461C4B1E84}" type="slidenum">
               <a:rPr lang="en-IN" smtClean="0"/>
-              <a:t>32</a:t>
+              <a:t>33</a:t>
             </a:fld>
             <a:endParaRPr lang="en-IN"/>
           </a:p>
@@ -6626,7 +6627,7 @@
           <a:p>
             <a:fld id="{D118A67C-CD00-4FBA-89AB-9ABCAF3D8767}" type="slidenum">
               <a:rPr lang="en-IN" smtClean="0"/>
-              <a:t>33</a:t>
+              <a:t>34</a:t>
             </a:fld>
             <a:endParaRPr lang="en-IN"/>
           </a:p>
@@ -6691,7 +6692,7 @@
           <a:p>
             <a:r>
               <a:rPr lang="en-US" dirty="0"/>
-              <a:t>This exercise aims to compute the value of variable “c” at all program points. Notice that for BB3, the value of c coming from BB1 is 6, and BB2 is 3. When the compiler is unable to determine a unique constant value for c at a given point, then the compiler assumes that the value of c is not a constant at that point. In this example, the value c is not constant in BB3. </a:t>
+              <a:t>This exercise aims to compute the value of variable “c” at all program points. The value of “c” after line-1 is undefined, line-2 is 3, line-3 is 3, line-4 is 6, line-5 is 6, line-6 is 3, line-7 is 3. Notice that before line-8, the value of c will be 6 if the last basic block is BB1, or it will be 3 when the previous block is BB2 during the execution. When the compiler cannot determine a unique constant value for “c” at a given point, the compiler assumes that the value of “c” is not a constant at that point. In this example, the value of “c” is not constant before line-8 and line-9. </a:t>
             </a:r>
             <a:endParaRPr lang="en-IN" dirty="0"/>
           </a:p>
@@ -6714,7 +6715,7 @@
           <a:p>
             <a:fld id="{D118A67C-CD00-4FBA-89AB-9ABCAF3D8767}" type="slidenum">
               <a:rPr lang="en-IN" smtClean="0"/>
-              <a:t>34</a:t>
+              <a:t>35</a:t>
             </a:fld>
             <a:endParaRPr lang="en-IN"/>
           </a:p>
@@ -6798,7 +6799,7 @@
           <a:p>
             <a:fld id="{D118A67C-CD00-4FBA-89AB-9ABCAF3D8767}" type="slidenum">
               <a:rPr lang="en-IN" smtClean="0"/>
-              <a:t>35</a:t>
+              <a:t>36</a:t>
             </a:fld>
             <a:endParaRPr lang="en-IN"/>
           </a:p>
@@ -6882,7 +6883,7 @@
           <a:p>
             <a:fld id="{D118A67C-CD00-4FBA-89AB-9ABCAF3D8767}" type="slidenum">
               <a:rPr lang="en-IN" smtClean="0"/>
-              <a:t>36</a:t>
+              <a:t>37</a:t>
             </a:fld>
             <a:endParaRPr lang="en-IN"/>
           </a:p>
@@ -6966,7 +6967,7 @@
           <a:p>
             <a:fld id="{D118A67C-CD00-4FBA-89AB-9ABCAF3D8767}" type="slidenum">
               <a:rPr lang="en-IN" smtClean="0"/>
-              <a:t>37</a:t>
+              <a:t>38</a:t>
             </a:fld>
             <a:endParaRPr lang="en-IN"/>
           </a:p>
@@ -7050,7 +7051,7 @@
           <a:p>
             <a:fld id="{D118A67C-CD00-4FBA-89AB-9ABCAF3D8767}" type="slidenum">
               <a:rPr lang="en-IN" smtClean="0"/>
-              <a:t>38</a:t>
+              <a:t>39</a:t>
             </a:fld>
             <a:endParaRPr lang="en-IN"/>
           </a:p>
@@ -7134,7 +7135,7 @@
           <a:p>
             <a:fld id="{D118A67C-CD00-4FBA-89AB-9ABCAF3D8767}" type="slidenum">
               <a:rPr lang="en-IN" smtClean="0"/>
-              <a:t>39</a:t>
+              <a:t>40</a:t>
             </a:fld>
             <a:endParaRPr lang="en-IN"/>
           </a:p>
@@ -7302,7 +7303,7 @@
           <a:p>
             <a:fld id="{D118A67C-CD00-4FBA-89AB-9ABCAF3D8767}" type="slidenum">
               <a:rPr lang="en-IN" smtClean="0"/>
-              <a:t>40</a:t>
+              <a:t>41</a:t>
             </a:fld>
             <a:endParaRPr lang="en-IN"/>
           </a:p>
@@ -7390,7 +7391,7 @@
           <a:p>
             <a:fld id="{D118A67C-CD00-4FBA-89AB-9ABCAF3D8767}" type="slidenum">
               <a:rPr lang="en-IN" smtClean="0"/>
-              <a:t>41</a:t>
+              <a:t>42</a:t>
             </a:fld>
             <a:endParaRPr lang="en-IN"/>
           </a:p>
@@ -7491,7 +7492,7 @@
           <a:p>
             <a:fld id="{D118A67C-CD00-4FBA-89AB-9ABCAF3D8767}" type="slidenum">
               <a:rPr lang="en-IN" smtClean="0"/>
-              <a:t>42</a:t>
+              <a:t>43</a:t>
             </a:fld>
             <a:endParaRPr lang="en-IN"/>
           </a:p>
@@ -7579,7 +7580,7 @@
           <a:p>
             <a:fld id="{D118A67C-CD00-4FBA-89AB-9ABCAF3D8767}" type="slidenum">
               <a:rPr lang="en-IN" smtClean="0"/>
-              <a:t>43</a:t>
+              <a:t>44</a:t>
             </a:fld>
             <a:endParaRPr lang="en-IN"/>
           </a:p>
@@ -7667,7 +7668,7 @@
           <a:p>
             <a:fld id="{D118A67C-CD00-4FBA-89AB-9ABCAF3D8767}" type="slidenum">
               <a:rPr lang="en-IN" smtClean="0"/>
-              <a:t>44</a:t>
+              <a:t>45</a:t>
             </a:fld>
             <a:endParaRPr lang="en-IN"/>
           </a:p>
@@ -7755,7 +7756,7 @@
           <a:p>
             <a:fld id="{D118A67C-CD00-4FBA-89AB-9ABCAF3D8767}" type="slidenum">
               <a:rPr lang="en-IN" smtClean="0"/>
-              <a:t>45</a:t>
+              <a:t>46</a:t>
             </a:fld>
             <a:endParaRPr lang="en-IN"/>
           </a:p>
@@ -7818,7 +7819,10 @@
           <a:bodyPr/>
           <a:lstStyle/>
           <a:p>
-            <a:endParaRPr lang="en-IN" dirty="0"/>
+            <a:r>
+              <a:rPr lang="en-IN" dirty="0"/>
+              <a:t>The transfer function needs to be defined for each instruction in the IR. For example, the transfer function for addition takes the set of facts before line-4 as input and computes the set of facts that are true after the execution of line-4. The transfer function for addition is also used at line-6. Similarly, the transfer function for multiplication computes the set of facts after line-7 from the set of facts before line-7.</a:t>
+            </a:r>
           </a:p>
         </p:txBody>
       </p:sp>
@@ -7839,7 +7843,7 @@
           <a:p>
             <a:fld id="{D118A67C-CD00-4FBA-89AB-9ABCAF3D8767}" type="slidenum">
               <a:rPr lang="en-IN" smtClean="0"/>
-              <a:t>46</a:t>
+              <a:t>47</a:t>
             </a:fld>
             <a:endParaRPr lang="en-IN"/>
           </a:p>
@@ -7923,7 +7927,7 @@
           <a:p>
             <a:fld id="{D118A67C-CD00-4FBA-89AB-9ABCAF3D8767}" type="slidenum">
               <a:rPr lang="en-IN" smtClean="0"/>
-              <a:t>47</a:t>
+              <a:t>48</a:t>
             </a:fld>
             <a:endParaRPr lang="en-IN"/>
           </a:p>
@@ -8028,7 +8032,7 @@
           <a:p>
             <a:fld id="{D118A67C-CD00-4FBA-89AB-9ABCAF3D8767}" type="slidenum">
               <a:rPr lang="en-IN" smtClean="0"/>
-              <a:t>48</a:t>
+              <a:t>49</a:t>
             </a:fld>
             <a:endParaRPr lang="en-IN"/>
           </a:p>
@@ -8116,7 +8120,7 @@
           <a:p>
             <a:fld id="{D118A67C-CD00-4FBA-89AB-9ABCAF3D8767}" type="slidenum">
               <a:rPr lang="en-IN" smtClean="0"/>
-              <a:t>49</a:t>
+              <a:t>50</a:t>
             </a:fld>
             <a:endParaRPr lang="en-IN"/>
           </a:p>
@@ -8292,7 +8296,7 @@
           <a:p>
             <a:fld id="{D118A67C-CD00-4FBA-89AB-9ABCAF3D8767}" type="slidenum">
               <a:rPr lang="en-IN" smtClean="0"/>
-              <a:t>50</a:t>
+              <a:t>51</a:t>
             </a:fld>
             <a:endParaRPr lang="en-IN"/>
           </a:p>
@@ -8376,7 +8380,7 @@
           <a:p>
             <a:fld id="{D118A67C-CD00-4FBA-89AB-9ABCAF3D8767}" type="slidenum">
               <a:rPr lang="en-IN" smtClean="0"/>
-              <a:t>51</a:t>
+              <a:t>52</a:t>
             </a:fld>
             <a:endParaRPr lang="en-IN"/>
           </a:p>
@@ -8460,7 +8464,7 @@
           <a:p>
             <a:fld id="{D118A67C-CD00-4FBA-89AB-9ABCAF3D8767}" type="slidenum">
               <a:rPr lang="en-IN" smtClean="0"/>
-              <a:t>52</a:t>
+              <a:t>53</a:t>
             </a:fld>
             <a:endParaRPr lang="en-IN"/>
           </a:p>
@@ -8544,7 +8548,7 @@
           <a:p>
             <a:fld id="{D118A67C-CD00-4FBA-89AB-9ABCAF3D8767}" type="slidenum">
               <a:rPr lang="en-IN" smtClean="0"/>
-              <a:t>53</a:t>
+              <a:t>54</a:t>
             </a:fld>
             <a:endParaRPr lang="en-IN"/>
           </a:p>
@@ -8631,7 +8635,7 @@
           <a:p>
             <a:fld id="{D118A67C-CD00-4FBA-89AB-9ABCAF3D8767}" type="slidenum">
               <a:rPr lang="en-IN" smtClean="0"/>
-              <a:t>54</a:t>
+              <a:t>55</a:t>
             </a:fld>
             <a:endParaRPr lang="en-IN"/>
           </a:p>
@@ -8715,7 +8719,7 @@
           <a:p>
             <a:fld id="{D118A67C-CD00-4FBA-89AB-9ABCAF3D8767}" type="slidenum">
               <a:rPr lang="en-IN" smtClean="0"/>
-              <a:t>55</a:t>
+              <a:t>56</a:t>
             </a:fld>
             <a:endParaRPr lang="en-IN"/>
           </a:p>
@@ -8803,7 +8807,7 @@
           <a:p>
             <a:fld id="{D118A67C-CD00-4FBA-89AB-9ABCAF3D8767}" type="slidenum">
               <a:rPr lang="en-IN" smtClean="0"/>
-              <a:t>56</a:t>
+              <a:t>57</a:t>
             </a:fld>
             <a:endParaRPr lang="en-IN"/>
           </a:p>
@@ -9366,7 +9370,7 @@
           <a:p>
             <a:fld id="{1377C711-0476-4937-97FF-5A1D3E41300C}" type="datetimeFigureOut">
               <a:rPr lang="en-IN" smtClean="0"/>
-              <a:t>12-09-2022</a:t>
+              <a:t>23-01-2024</a:t>
             </a:fld>
             <a:endParaRPr lang="en-IN"/>
           </a:p>
@@ -9566,7 +9570,7 @@
           <a:p>
             <a:fld id="{1377C711-0476-4937-97FF-5A1D3E41300C}" type="datetimeFigureOut">
               <a:rPr lang="en-IN" smtClean="0"/>
-              <a:t>12-09-2022</a:t>
+              <a:t>23-01-2024</a:t>
             </a:fld>
             <a:endParaRPr lang="en-IN"/>
           </a:p>
@@ -9776,7 +9780,7 @@
           <a:p>
             <a:fld id="{1377C711-0476-4937-97FF-5A1D3E41300C}" type="datetimeFigureOut">
               <a:rPr lang="en-IN" smtClean="0"/>
-              <a:t>12-09-2022</a:t>
+              <a:t>23-01-2024</a:t>
             </a:fld>
             <a:endParaRPr lang="en-IN"/>
           </a:p>
@@ -9976,7 +9980,7 @@
           <a:p>
             <a:fld id="{1377C711-0476-4937-97FF-5A1D3E41300C}" type="datetimeFigureOut">
               <a:rPr lang="en-IN" smtClean="0"/>
-              <a:t>12-09-2022</a:t>
+              <a:t>23-01-2024</a:t>
             </a:fld>
             <a:endParaRPr lang="en-IN"/>
           </a:p>
@@ -10252,7 +10256,7 @@
           <a:p>
             <a:fld id="{1377C711-0476-4937-97FF-5A1D3E41300C}" type="datetimeFigureOut">
               <a:rPr lang="en-IN" smtClean="0"/>
-              <a:t>12-09-2022</a:t>
+              <a:t>23-01-2024</a:t>
             </a:fld>
             <a:endParaRPr lang="en-IN"/>
           </a:p>
@@ -10520,7 +10524,7 @@
           <a:p>
             <a:fld id="{1377C711-0476-4937-97FF-5A1D3E41300C}" type="datetimeFigureOut">
               <a:rPr lang="en-IN" smtClean="0"/>
-              <a:t>12-09-2022</a:t>
+              <a:t>23-01-2024</a:t>
             </a:fld>
             <a:endParaRPr lang="en-IN"/>
           </a:p>
@@ -10935,7 +10939,7 @@
           <a:p>
             <a:fld id="{1377C711-0476-4937-97FF-5A1D3E41300C}" type="datetimeFigureOut">
               <a:rPr lang="en-IN" smtClean="0"/>
-              <a:t>12-09-2022</a:t>
+              <a:t>23-01-2024</a:t>
             </a:fld>
             <a:endParaRPr lang="en-IN"/>
           </a:p>
@@ -11077,7 +11081,7 @@
           <a:p>
             <a:fld id="{1377C711-0476-4937-97FF-5A1D3E41300C}" type="datetimeFigureOut">
               <a:rPr lang="en-IN" smtClean="0"/>
-              <a:t>12-09-2022</a:t>
+              <a:t>23-01-2024</a:t>
             </a:fld>
             <a:endParaRPr lang="en-IN"/>
           </a:p>
@@ -11190,7 +11194,7 @@
           <a:p>
             <a:fld id="{1377C711-0476-4937-97FF-5A1D3E41300C}" type="datetimeFigureOut">
               <a:rPr lang="en-IN" smtClean="0"/>
-              <a:t>12-09-2022</a:t>
+              <a:t>23-01-2024</a:t>
             </a:fld>
             <a:endParaRPr lang="en-IN"/>
           </a:p>
@@ -11503,7 +11507,7 @@
           <a:p>
             <a:fld id="{1377C711-0476-4937-97FF-5A1D3E41300C}" type="datetimeFigureOut">
               <a:rPr lang="en-IN" smtClean="0"/>
-              <a:t>12-09-2022</a:t>
+              <a:t>23-01-2024</a:t>
             </a:fld>
             <a:endParaRPr lang="en-IN"/>
           </a:p>
@@ -11792,7 +11796,7 @@
           <a:p>
             <a:fld id="{1377C711-0476-4937-97FF-5A1D3E41300C}" type="datetimeFigureOut">
               <a:rPr lang="en-IN" smtClean="0"/>
-              <a:t>12-09-2022</a:t>
+              <a:t>23-01-2024</a:t>
             </a:fld>
             <a:endParaRPr lang="en-IN"/>
           </a:p>
@@ -12035,7 +12039,7 @@
           <a:p>
             <a:fld id="{1377C711-0476-4937-97FF-5A1D3E41300C}" type="datetimeFigureOut">
               <a:rPr lang="en-IN" smtClean="0"/>
-              <a:t>12-09-2022</a:t>
+              <a:t>23-01-2024</a:t>
             </a:fld>
             <a:endParaRPr lang="en-IN"/>
           </a:p>
@@ -25247,7 +25251,7 @@
           <p:cNvPr id="2" name="Title 1">
             <a:extLst>
               <a:ext uri="{FF2B5EF4-FFF2-40B4-BE49-F238E27FC236}">
-                <a16:creationId xmlns:a16="http://schemas.microsoft.com/office/drawing/2014/main" id="{10ABBED3-9A18-4A87-83D0-6A8516D62F73}"/>
+                <a16:creationId xmlns:a16="http://schemas.microsoft.com/office/drawing/2014/main" id="{ED01B005-ED8D-C600-52B2-8AF98AD5B73D}"/>
               </a:ext>
             </a:extLst>
           </p:cNvPr>
@@ -25264,10 +25268,9 @@
           <a:lstStyle/>
           <a:p>
             <a:r>
-              <a:rPr lang="en-US" dirty="0"/>
-              <a:t>Local optimizations</a:t>
-            </a:r>
-            <a:endParaRPr lang="en-IN" dirty="0"/>
+              <a:rPr lang="en-IN" dirty="0"/>
+              <a:t>Assignment-1</a:t>
+            </a:r>
           </a:p>
         </p:txBody>
       </p:sp>
@@ -25276,7 +25279,7 @@
           <p:cNvPr id="3" name="Content Placeholder 2">
             <a:extLst>
               <a:ext uri="{FF2B5EF4-FFF2-40B4-BE49-F238E27FC236}">
-                <a16:creationId xmlns:a16="http://schemas.microsoft.com/office/drawing/2014/main" id="{BC674AE3-BEFA-46F0-A52B-A07E59D24BE6}"/>
+                <a16:creationId xmlns:a16="http://schemas.microsoft.com/office/drawing/2014/main" id="{BCB7E61A-43E7-A5EC-1A0C-0206DE713942}"/>
               </a:ext>
             </a:extLst>
           </p:cNvPr>
@@ -25293,46 +25296,37 @@
           <a:lstStyle/>
           <a:p>
             <a:r>
-              <a:rPr lang="en-US" dirty="0"/>
-              <a:t>Local optimizations are performed on the basic block granularity</a:t>
-            </a:r>
+              <a:rPr lang="en-IN" dirty="0"/>
+              <a:t>Compile the LLVM compiler</a:t>
+            </a:r>
+          </a:p>
+          <a:p>
+            <a:pPr marL="0" indent="0">
+              <a:buNone/>
+            </a:pPr>
             <a:endParaRPr lang="en-IN" dirty="0"/>
           </a:p>
           <a:p>
-            <a:pPr lvl="1"/>
             <a:r>
               <a:rPr lang="en-IN" dirty="0"/>
-              <a:t>Local optimizations are easy to implement</a:t>
-            </a:r>
-          </a:p>
-          <a:p>
-            <a:pPr lvl="1"/>
-            <a:r>
-              <a:rPr lang="en-IN" dirty="0"/>
-              <a:t>However, there aren’t too many optimization opportunities exists for local optimization</a:t>
-            </a:r>
-          </a:p>
-          <a:p>
-            <a:pPr lvl="1"/>
+              <a:t>Study the IR generated by the LLVM compiler and write the semantics of  IR instructions, similar to what you did in homework 1 for x86 assembly instructions </a:t>
+            </a:r>
+          </a:p>
+          <a:p>
             <a:endParaRPr lang="en-IN" dirty="0"/>
           </a:p>
           <a:p>
-            <a:pPr lvl="1"/>
+            <a:pPr marL="0" indent="0">
+              <a:buNone/>
+            </a:pPr>
             <a:endParaRPr lang="en-IN" dirty="0"/>
-          </a:p>
-          <a:p>
-            <a:r>
-              <a:rPr lang="en-IN" dirty="0"/>
-              <a:t>Read Section-8.5.4 from the dragon book</a:t>
-            </a:r>
-            <a:endParaRPr lang="en-US" dirty="0"/>
           </a:p>
         </p:txBody>
       </p:sp>
     </p:spTree>
     <p:extLst>
       <p:ext uri="{BB962C8B-B14F-4D97-AF65-F5344CB8AC3E}">
-        <p14:creationId xmlns:p14="http://schemas.microsoft.com/office/powerpoint/2010/main" val="3285242169"/>
+        <p14:creationId xmlns:p14="http://schemas.microsoft.com/office/powerpoint/2010/main" val="833432522"/>
       </p:ext>
     </p:extLst>
   </p:cSld>
@@ -25364,7 +25358,7 @@
           <p:cNvPr id="2" name="Title 1">
             <a:extLst>
               <a:ext uri="{FF2B5EF4-FFF2-40B4-BE49-F238E27FC236}">
-                <a16:creationId xmlns:a16="http://schemas.microsoft.com/office/drawing/2014/main" id="{31CF15EE-D612-4F59-800B-533B8FFD5AC5}"/>
+                <a16:creationId xmlns:a16="http://schemas.microsoft.com/office/drawing/2014/main" id="{10ABBED3-9A18-4A87-83D0-6A8516D62F73}"/>
               </a:ext>
             </a:extLst>
           </p:cNvPr>
@@ -25393,7 +25387,7 @@
           <p:cNvPr id="3" name="Content Placeholder 2">
             <a:extLst>
               <a:ext uri="{FF2B5EF4-FFF2-40B4-BE49-F238E27FC236}">
-                <a16:creationId xmlns:a16="http://schemas.microsoft.com/office/drawing/2014/main" id="{10D9115F-CA51-433B-831E-E697E85E65E2}"/>
+                <a16:creationId xmlns:a16="http://schemas.microsoft.com/office/drawing/2014/main" id="{BC674AE3-BEFA-46F0-A52B-A07E59D24BE6}"/>
               </a:ext>
             </a:extLst>
           </p:cNvPr>
@@ -25409,275 +25403,47 @@
           <a:bodyPr/>
           <a:lstStyle/>
           <a:p>
-            <a:pPr marL="0" indent="0">
-              <a:buNone/>
-            </a:pPr>
+            <a:r>
+              <a:rPr lang="en-US" dirty="0"/>
+              <a:t>Local optimizations are performed on the basic block granularity</a:t>
+            </a:r>
             <a:endParaRPr lang="en-IN" dirty="0"/>
           </a:p>
-        </p:txBody>
-      </p:sp>
-      <p:sp>
-        <p:nvSpPr>
-          <p:cNvPr id="4" name="TextBox 3">
-            <a:extLst>
-              <a:ext uri="{FF2B5EF4-FFF2-40B4-BE49-F238E27FC236}">
-                <a16:creationId xmlns:a16="http://schemas.microsoft.com/office/drawing/2014/main" id="{398B60A6-DB0F-4156-B164-C4DD5422A326}"/>
-              </a:ext>
-            </a:extLst>
-          </p:cNvPr>
-          <p:cNvSpPr txBox="1"/>
-          <p:nvPr/>
-        </p:nvSpPr>
-        <p:spPr>
-          <a:xfrm>
-            <a:off x="1676400" y="2600960"/>
-            <a:ext cx="2570480" cy="1477328"/>
-          </a:xfrm>
-          <a:prstGeom prst="rect">
-            <a:avLst/>
-          </a:prstGeom>
-          <a:noFill/>
-        </p:spPr>
-        <p:txBody>
-          <a:bodyPr wrap="square" rtlCol="0">
-            <a:spAutoFit/>
-          </a:bodyPr>
-          <a:lstStyle/>
-          <a:p>
-            <a:pPr marL="0" indent="0">
-              <a:buNone/>
-            </a:pPr>
-            <a:r>
-              <a:rPr lang="en-US" dirty="0"/>
-              <a:t>BB:</a:t>
-            </a:r>
-          </a:p>
-          <a:p>
-            <a:pPr marL="0" indent="0">
-              <a:buNone/>
-            </a:pPr>
-            <a:r>
-              <a:rPr lang="en-US" dirty="0"/>
-              <a:t>a = b + c</a:t>
-            </a:r>
-          </a:p>
-          <a:p>
-            <a:pPr marL="0" indent="0">
-              <a:buNone/>
-            </a:pPr>
-            <a:r>
-              <a:rPr lang="en-US" dirty="0"/>
-              <a:t>d = b – c          =&gt;</a:t>
-            </a:r>
-          </a:p>
-          <a:p>
-            <a:pPr marL="0" indent="0">
-              <a:buNone/>
-            </a:pPr>
-            <a:r>
-              <a:rPr lang="en-US" dirty="0"/>
-              <a:t>e = b + c</a:t>
-            </a:r>
-          </a:p>
-          <a:p>
-            <a:pPr marL="0" indent="0">
-              <a:buNone/>
-            </a:pPr>
-            <a:r>
-              <a:rPr lang="en-US" dirty="0"/>
-              <a:t>f = e</a:t>
-            </a:r>
+          <a:p>
+            <a:pPr lvl="1"/>
+            <a:r>
+              <a:rPr lang="en-IN" dirty="0"/>
+              <a:t>Local optimizations are easy to implement</a:t>
+            </a:r>
+          </a:p>
+          <a:p>
+            <a:pPr lvl="1"/>
+            <a:r>
+              <a:rPr lang="en-IN" dirty="0"/>
+              <a:t>However, there aren’t too many optimization opportunities exists for local optimization</a:t>
+            </a:r>
+          </a:p>
+          <a:p>
+            <a:pPr lvl="1"/>
             <a:endParaRPr lang="en-IN" dirty="0"/>
           </a:p>
-        </p:txBody>
-      </p:sp>
-      <p:sp>
-        <p:nvSpPr>
-          <p:cNvPr id="6" name="TextBox 5">
-            <a:extLst>
-              <a:ext uri="{FF2B5EF4-FFF2-40B4-BE49-F238E27FC236}">
-                <a16:creationId xmlns:a16="http://schemas.microsoft.com/office/drawing/2014/main" id="{F6F28F7C-FA68-4646-AEE1-EDE4EF062F7C}"/>
-              </a:ext>
-            </a:extLst>
-          </p:cNvPr>
-          <p:cNvSpPr txBox="1"/>
-          <p:nvPr/>
-        </p:nvSpPr>
-        <p:spPr>
-          <a:xfrm>
-            <a:off x="4003040" y="2580640"/>
-            <a:ext cx="2570480" cy="1477328"/>
-          </a:xfrm>
-          <a:prstGeom prst="rect">
-            <a:avLst/>
-          </a:prstGeom>
-          <a:noFill/>
-        </p:spPr>
-        <p:txBody>
-          <a:bodyPr wrap="square" rtlCol="0">
-            <a:spAutoFit/>
-          </a:bodyPr>
-          <a:lstStyle/>
-          <a:p>
-            <a:pPr marL="0" indent="0">
-              <a:buNone/>
-            </a:pPr>
-            <a:r>
-              <a:rPr lang="en-US" dirty="0"/>
-              <a:t>BB:</a:t>
-            </a:r>
-          </a:p>
-          <a:p>
-            <a:pPr marL="0" indent="0">
-              <a:buNone/>
-            </a:pPr>
-            <a:r>
-              <a:rPr lang="en-US" dirty="0"/>
-              <a:t>a = b + c</a:t>
-            </a:r>
-          </a:p>
-          <a:p>
-            <a:pPr marL="0" indent="0">
-              <a:buNone/>
-            </a:pPr>
-            <a:r>
-              <a:rPr lang="en-US" dirty="0"/>
-              <a:t>d = b – c           =&gt;</a:t>
-            </a:r>
-          </a:p>
-          <a:p>
-            <a:pPr marL="0" indent="0">
-              <a:buNone/>
-            </a:pPr>
-            <a:r>
-              <a:rPr lang="en-US" dirty="0"/>
-              <a:t>e = a</a:t>
-            </a:r>
-          </a:p>
-          <a:p>
-            <a:pPr marL="0" indent="0">
-              <a:buNone/>
-            </a:pPr>
-            <a:r>
-              <a:rPr lang="en-US" dirty="0"/>
-              <a:t>f = e</a:t>
-            </a:r>
+          <a:p>
+            <a:pPr lvl="1"/>
             <a:endParaRPr lang="en-IN" dirty="0"/>
           </a:p>
-        </p:txBody>
-      </p:sp>
-      <p:sp>
-        <p:nvSpPr>
-          <p:cNvPr id="8" name="TextBox 7">
-            <a:extLst>
-              <a:ext uri="{FF2B5EF4-FFF2-40B4-BE49-F238E27FC236}">
-                <a16:creationId xmlns:a16="http://schemas.microsoft.com/office/drawing/2014/main" id="{DDC4BF67-D217-48A6-83C0-70C40525B802}"/>
-              </a:ext>
-            </a:extLst>
-          </p:cNvPr>
-          <p:cNvSpPr txBox="1"/>
-          <p:nvPr/>
-        </p:nvSpPr>
-        <p:spPr>
-          <a:xfrm>
-            <a:off x="6492240" y="2621280"/>
-            <a:ext cx="2570480" cy="1200329"/>
-          </a:xfrm>
-          <a:prstGeom prst="rect">
-            <a:avLst/>
-          </a:prstGeom>
-          <a:noFill/>
-        </p:spPr>
-        <p:txBody>
-          <a:bodyPr wrap="square" rtlCol="0">
-            <a:spAutoFit/>
-          </a:bodyPr>
-          <a:lstStyle/>
-          <a:p>
-            <a:pPr marL="0" indent="0">
-              <a:buNone/>
-            </a:pPr>
-            <a:r>
-              <a:rPr lang="en-US" dirty="0"/>
-              <a:t>BB:</a:t>
-            </a:r>
-          </a:p>
-          <a:p>
-            <a:pPr marL="0" indent="0">
-              <a:buNone/>
-            </a:pPr>
-            <a:r>
-              <a:rPr lang="en-US" dirty="0"/>
-              <a:t>a = b + c</a:t>
-            </a:r>
-          </a:p>
-          <a:p>
-            <a:pPr marL="0" indent="0">
-              <a:buNone/>
-            </a:pPr>
-            <a:r>
-              <a:rPr lang="en-US" dirty="0"/>
-              <a:t>d = b – c</a:t>
-            </a:r>
-          </a:p>
-          <a:p>
-            <a:pPr marL="0" indent="0">
-              <a:buNone/>
-            </a:pPr>
-            <a:r>
-              <a:rPr lang="en-US" dirty="0"/>
-              <a:t>f = a</a:t>
-            </a:r>
-            <a:endParaRPr lang="en-IN" dirty="0"/>
-          </a:p>
-        </p:txBody>
-      </p:sp>
-      <p:sp>
-        <p:nvSpPr>
-          <p:cNvPr id="9" name="TextBox 8">
-            <a:extLst>
-              <a:ext uri="{FF2B5EF4-FFF2-40B4-BE49-F238E27FC236}">
-                <a16:creationId xmlns:a16="http://schemas.microsoft.com/office/drawing/2014/main" id="{D8C69802-FA25-4307-A91A-D83494383E47}"/>
-              </a:ext>
-            </a:extLst>
-          </p:cNvPr>
-          <p:cNvSpPr txBox="1"/>
-          <p:nvPr/>
-        </p:nvSpPr>
-        <p:spPr>
-          <a:xfrm>
-            <a:off x="3525520" y="4734560"/>
-            <a:ext cx="4917440" cy="646331"/>
-          </a:xfrm>
-          <a:prstGeom prst="rect">
-            <a:avLst/>
-          </a:prstGeom>
-          <a:noFill/>
-        </p:spPr>
-        <p:txBody>
-          <a:bodyPr wrap="square" rtlCol="0">
-            <a:spAutoFit/>
-          </a:bodyPr>
-          <a:lstStyle/>
-          <a:p>
-            <a:r>
-              <a:rPr lang="en-US" dirty="0"/>
-              <a:t>Consider the basic block BB.</a:t>
-            </a:r>
-          </a:p>
-          <a:p>
-            <a:r>
-              <a:rPr lang="en-US" dirty="0"/>
-              <a:t>Is the above transformation correct? </a:t>
-            </a:r>
-            <a:endParaRPr lang="en-IN" dirty="0"/>
+          <a:p>
+            <a:r>
+              <a:rPr lang="en-IN" dirty="0"/>
+              <a:t>Read Section-8.5.4 from the dragon book</a:t>
+            </a:r>
+            <a:endParaRPr lang="en-US" dirty="0"/>
           </a:p>
         </p:txBody>
       </p:sp>
     </p:spTree>
     <p:extLst>
       <p:ext uri="{BB962C8B-B14F-4D97-AF65-F5344CB8AC3E}">
-        <p14:creationId xmlns:p14="http://schemas.microsoft.com/office/powerpoint/2010/main" val="2911888869"/>
+        <p14:creationId xmlns:p14="http://schemas.microsoft.com/office/powerpoint/2010/main" val="3285242169"/>
       </p:ext>
     </p:extLst>
   </p:cSld>
@@ -25709,7 +25475,7 @@
           <p:cNvPr id="2" name="Title 1">
             <a:extLst>
               <a:ext uri="{FF2B5EF4-FFF2-40B4-BE49-F238E27FC236}">
-                <a16:creationId xmlns:a16="http://schemas.microsoft.com/office/drawing/2014/main" id="{B5240FAE-A47F-4083-A0A5-0022BA8578F0}"/>
+                <a16:creationId xmlns:a16="http://schemas.microsoft.com/office/drawing/2014/main" id="{31CF15EE-D612-4F59-800B-533B8FFD5AC5}"/>
               </a:ext>
             </a:extLst>
           </p:cNvPr>
@@ -25738,7 +25504,7 @@
           <p:cNvPr id="3" name="Content Placeholder 2">
             <a:extLst>
               <a:ext uri="{FF2B5EF4-FFF2-40B4-BE49-F238E27FC236}">
-                <a16:creationId xmlns:a16="http://schemas.microsoft.com/office/drawing/2014/main" id="{3CED7663-9B6B-4342-AC26-147521672072}"/>
+                <a16:creationId xmlns:a16="http://schemas.microsoft.com/office/drawing/2014/main" id="{10D9115F-CA51-433B-831E-E697E85E65E2}"/>
               </a:ext>
             </a:extLst>
           </p:cNvPr>
@@ -25754,45 +25520,275 @@
           <a:bodyPr/>
           <a:lstStyle/>
           <a:p>
+            <a:pPr marL="0" indent="0">
+              <a:buNone/>
+            </a:pPr>
+            <a:endParaRPr lang="en-IN" dirty="0"/>
+          </a:p>
+        </p:txBody>
+      </p:sp>
+      <p:sp>
+        <p:nvSpPr>
+          <p:cNvPr id="4" name="TextBox 3">
+            <a:extLst>
+              <a:ext uri="{FF2B5EF4-FFF2-40B4-BE49-F238E27FC236}">
+                <a16:creationId xmlns:a16="http://schemas.microsoft.com/office/drawing/2014/main" id="{398B60A6-DB0F-4156-B164-C4DD5422A326}"/>
+              </a:ext>
+            </a:extLst>
+          </p:cNvPr>
+          <p:cNvSpPr txBox="1"/>
+          <p:nvPr/>
+        </p:nvSpPr>
+        <p:spPr>
+          <a:xfrm>
+            <a:off x="1676400" y="2600960"/>
+            <a:ext cx="2570480" cy="1477328"/>
+          </a:xfrm>
+          <a:prstGeom prst="rect">
+            <a:avLst/>
+          </a:prstGeom>
+          <a:noFill/>
+        </p:spPr>
+        <p:txBody>
+          <a:bodyPr wrap="square" rtlCol="0">
+            <a:spAutoFit/>
+          </a:bodyPr>
+          <a:lstStyle/>
+          <a:p>
+            <a:pPr marL="0" indent="0">
+              <a:buNone/>
+            </a:pPr>
             <a:r>
               <a:rPr lang="en-US" dirty="0"/>
-              <a:t>Algebraic identities</a:t>
-            </a:r>
-          </a:p>
-          <a:p>
-            <a:pPr lvl="1"/>
+              <a:t>BB:</a:t>
+            </a:r>
+          </a:p>
+          <a:p>
+            <a:pPr marL="0" indent="0">
+              <a:buNone/>
+            </a:pPr>
             <a:r>
               <a:rPr lang="en-US" dirty="0"/>
-              <a:t>x + 0 = 0 + x = x</a:t>
-            </a:r>
-          </a:p>
-          <a:p>
-            <a:pPr lvl="1"/>
+              <a:t>a = b + c</a:t>
+            </a:r>
+          </a:p>
+          <a:p>
+            <a:pPr marL="0" indent="0">
+              <a:buNone/>
+            </a:pPr>
             <a:r>
               <a:rPr lang="en-US" dirty="0"/>
-              <a:t>x * 1 = 1 * x = x</a:t>
-            </a:r>
-          </a:p>
-          <a:p>
-            <a:pPr lvl="1"/>
+              <a:t>d = b – c          =&gt;</a:t>
+            </a:r>
+          </a:p>
+          <a:p>
+            <a:pPr marL="0" indent="0">
+              <a:buNone/>
+            </a:pPr>
             <a:r>
               <a:rPr lang="en-US" dirty="0"/>
-              <a:t>x – 0 = x</a:t>
-            </a:r>
-          </a:p>
-          <a:p>
-            <a:pPr lvl="1"/>
+              <a:t>e = b + c</a:t>
+            </a:r>
+          </a:p>
+          <a:p>
+            <a:pPr marL="0" indent="0">
+              <a:buNone/>
+            </a:pPr>
             <a:r>
               <a:rPr lang="en-US" dirty="0"/>
-              <a:t>x / 1 = x</a:t>
-            </a:r>
+              <a:t>f = e</a:t>
+            </a:r>
+            <a:endParaRPr lang="en-IN" dirty="0"/>
+          </a:p>
+        </p:txBody>
+      </p:sp>
+      <p:sp>
+        <p:nvSpPr>
+          <p:cNvPr id="6" name="TextBox 5">
+            <a:extLst>
+              <a:ext uri="{FF2B5EF4-FFF2-40B4-BE49-F238E27FC236}">
+                <a16:creationId xmlns:a16="http://schemas.microsoft.com/office/drawing/2014/main" id="{F6F28F7C-FA68-4646-AEE1-EDE4EF062F7C}"/>
+              </a:ext>
+            </a:extLst>
+          </p:cNvPr>
+          <p:cNvSpPr txBox="1"/>
+          <p:nvPr/>
+        </p:nvSpPr>
+        <p:spPr>
+          <a:xfrm>
+            <a:off x="4003040" y="2580640"/>
+            <a:ext cx="2570480" cy="1477328"/>
+          </a:xfrm>
+          <a:prstGeom prst="rect">
+            <a:avLst/>
+          </a:prstGeom>
+          <a:noFill/>
+        </p:spPr>
+        <p:txBody>
+          <a:bodyPr wrap="square" rtlCol="0">
+            <a:spAutoFit/>
+          </a:bodyPr>
+          <a:lstStyle/>
+          <a:p>
+            <a:pPr marL="0" indent="0">
+              <a:buNone/>
+            </a:pPr>
+            <a:r>
+              <a:rPr lang="en-US" dirty="0"/>
+              <a:t>BB:</a:t>
+            </a:r>
+          </a:p>
+          <a:p>
+            <a:pPr marL="0" indent="0">
+              <a:buNone/>
+            </a:pPr>
+            <a:r>
+              <a:rPr lang="en-US" dirty="0"/>
+              <a:t>a = b + c</a:t>
+            </a:r>
+          </a:p>
+          <a:p>
+            <a:pPr marL="0" indent="0">
+              <a:buNone/>
+            </a:pPr>
+            <a:r>
+              <a:rPr lang="en-US" dirty="0"/>
+              <a:t>d = b – c           =&gt;</a:t>
+            </a:r>
+          </a:p>
+          <a:p>
+            <a:pPr marL="0" indent="0">
+              <a:buNone/>
+            </a:pPr>
+            <a:r>
+              <a:rPr lang="en-US" dirty="0"/>
+              <a:t>e = a</a:t>
+            </a:r>
+          </a:p>
+          <a:p>
+            <a:pPr marL="0" indent="0">
+              <a:buNone/>
+            </a:pPr>
+            <a:r>
+              <a:rPr lang="en-US" dirty="0"/>
+              <a:t>f = e</a:t>
+            </a:r>
+            <a:endParaRPr lang="en-IN" dirty="0"/>
+          </a:p>
+        </p:txBody>
+      </p:sp>
+      <p:sp>
+        <p:nvSpPr>
+          <p:cNvPr id="8" name="TextBox 7">
+            <a:extLst>
+              <a:ext uri="{FF2B5EF4-FFF2-40B4-BE49-F238E27FC236}">
+                <a16:creationId xmlns:a16="http://schemas.microsoft.com/office/drawing/2014/main" id="{DDC4BF67-D217-48A6-83C0-70C40525B802}"/>
+              </a:ext>
+            </a:extLst>
+          </p:cNvPr>
+          <p:cNvSpPr txBox="1"/>
+          <p:nvPr/>
+        </p:nvSpPr>
+        <p:spPr>
+          <a:xfrm>
+            <a:off x="6492240" y="2621280"/>
+            <a:ext cx="2570480" cy="1200329"/>
+          </a:xfrm>
+          <a:prstGeom prst="rect">
+            <a:avLst/>
+          </a:prstGeom>
+          <a:noFill/>
+        </p:spPr>
+        <p:txBody>
+          <a:bodyPr wrap="square" rtlCol="0">
+            <a:spAutoFit/>
+          </a:bodyPr>
+          <a:lstStyle/>
+          <a:p>
+            <a:pPr marL="0" indent="0">
+              <a:buNone/>
+            </a:pPr>
+            <a:r>
+              <a:rPr lang="en-US" dirty="0"/>
+              <a:t>BB:</a:t>
+            </a:r>
+          </a:p>
+          <a:p>
+            <a:pPr marL="0" indent="0">
+              <a:buNone/>
+            </a:pPr>
+            <a:r>
+              <a:rPr lang="en-US" dirty="0"/>
+              <a:t>a = b + c</a:t>
+            </a:r>
+          </a:p>
+          <a:p>
+            <a:pPr marL="0" indent="0">
+              <a:buNone/>
+            </a:pPr>
+            <a:r>
+              <a:rPr lang="en-US" dirty="0"/>
+              <a:t>d = b – c</a:t>
+            </a:r>
+          </a:p>
+          <a:p>
+            <a:pPr marL="0" indent="0">
+              <a:buNone/>
+            </a:pPr>
+            <a:r>
+              <a:rPr lang="en-US" dirty="0"/>
+              <a:t>f = a</a:t>
+            </a:r>
+            <a:endParaRPr lang="en-IN" dirty="0"/>
+          </a:p>
+        </p:txBody>
+      </p:sp>
+      <p:sp>
+        <p:nvSpPr>
+          <p:cNvPr id="9" name="TextBox 8">
+            <a:extLst>
+              <a:ext uri="{FF2B5EF4-FFF2-40B4-BE49-F238E27FC236}">
+                <a16:creationId xmlns:a16="http://schemas.microsoft.com/office/drawing/2014/main" id="{D8C69802-FA25-4307-A91A-D83494383E47}"/>
+              </a:ext>
+            </a:extLst>
+          </p:cNvPr>
+          <p:cNvSpPr txBox="1"/>
+          <p:nvPr/>
+        </p:nvSpPr>
+        <p:spPr>
+          <a:xfrm>
+            <a:off x="3525520" y="4734560"/>
+            <a:ext cx="4917440" cy="646331"/>
+          </a:xfrm>
+          <a:prstGeom prst="rect">
+            <a:avLst/>
+          </a:prstGeom>
+          <a:noFill/>
+        </p:spPr>
+        <p:txBody>
+          <a:bodyPr wrap="square" rtlCol="0">
+            <a:spAutoFit/>
+          </a:bodyPr>
+          <a:lstStyle/>
+          <a:p>
+            <a:r>
+              <a:rPr lang="en-US" dirty="0"/>
+              <a:t>Consider the basic block BB.</a:t>
+            </a:r>
+          </a:p>
+          <a:p>
+            <a:r>
+              <a:rPr lang="en-US" dirty="0"/>
+              <a:t>Is the above transformation correct? </a:t>
+            </a:r>
+            <a:endParaRPr lang="en-IN" dirty="0"/>
           </a:p>
         </p:txBody>
       </p:sp>
     </p:spTree>
     <p:extLst>
       <p:ext uri="{BB962C8B-B14F-4D97-AF65-F5344CB8AC3E}">
-        <p14:creationId xmlns:p14="http://schemas.microsoft.com/office/powerpoint/2010/main" val="905611055"/>
+        <p14:creationId xmlns:p14="http://schemas.microsoft.com/office/powerpoint/2010/main" val="2911888869"/>
       </p:ext>
     </p:extLst>
   </p:cSld>
@@ -25824,7 +25820,7 @@
           <p:cNvPr id="2" name="Title 1">
             <a:extLst>
               <a:ext uri="{FF2B5EF4-FFF2-40B4-BE49-F238E27FC236}">
-                <a16:creationId xmlns:a16="http://schemas.microsoft.com/office/drawing/2014/main" id="{03561DA6-569D-4B8A-8707-2DDAF7E00A24}"/>
+                <a16:creationId xmlns:a16="http://schemas.microsoft.com/office/drawing/2014/main" id="{B5240FAE-A47F-4083-A0A5-0022BA8578F0}"/>
               </a:ext>
             </a:extLst>
           </p:cNvPr>
@@ -25853,7 +25849,7 @@
           <p:cNvPr id="3" name="Content Placeholder 2">
             <a:extLst>
               <a:ext uri="{FF2B5EF4-FFF2-40B4-BE49-F238E27FC236}">
-                <a16:creationId xmlns:a16="http://schemas.microsoft.com/office/drawing/2014/main" id="{7B954D99-B71A-4BDA-938A-21176BF22348}"/>
+                <a16:creationId xmlns:a16="http://schemas.microsoft.com/office/drawing/2014/main" id="{3CED7663-9B6B-4342-AC26-147521672072}"/>
               </a:ext>
             </a:extLst>
           </p:cNvPr>
@@ -25871,36 +25867,35 @@
           <a:p>
             <a:r>
               <a:rPr lang="en-US" dirty="0"/>
-              <a:t>Strength reduction</a:t>
+              <a:t>Algebraic identities</a:t>
             </a:r>
           </a:p>
           <a:p>
             <a:pPr lvl="1"/>
             <a:r>
               <a:rPr lang="en-US" dirty="0"/>
-              <a:t>x</a:t>
-            </a:r>
-            <a:r>
-              <a:rPr lang="en-US" baseline="30000" dirty="0"/>
-              <a:t>2</a:t>
-            </a:r>
+              <a:t>x + 0 = 0 + x = x</a:t>
+            </a:r>
+          </a:p>
+          <a:p>
+            <a:pPr lvl="1"/>
             <a:r>
               <a:rPr lang="en-US" dirty="0"/>
-              <a:t> = x * x</a:t>
+              <a:t>x * 1 = 1 * x = x</a:t>
             </a:r>
           </a:p>
           <a:p>
             <a:pPr lvl="1"/>
             <a:r>
               <a:rPr lang="en-US" dirty="0"/>
-              <a:t>2 * x = x + x</a:t>
+              <a:t>x – 0 = x</a:t>
             </a:r>
           </a:p>
           <a:p>
             <a:pPr lvl="1"/>
             <a:r>
               <a:rPr lang="en-US" dirty="0"/>
-              <a:t>x/2 = x * 0.5</a:t>
+              <a:t>x / 1 = x</a:t>
             </a:r>
           </a:p>
         </p:txBody>
@@ -25908,7 +25903,7 @@
     </p:spTree>
     <p:extLst>
       <p:ext uri="{BB962C8B-B14F-4D97-AF65-F5344CB8AC3E}">
-        <p14:creationId xmlns:p14="http://schemas.microsoft.com/office/powerpoint/2010/main" val="2955796025"/>
+        <p14:creationId xmlns:p14="http://schemas.microsoft.com/office/powerpoint/2010/main" val="905611055"/>
       </p:ext>
     </p:extLst>
   </p:cSld>
@@ -25940,7 +25935,7 @@
           <p:cNvPr id="2" name="Title 1">
             <a:extLst>
               <a:ext uri="{FF2B5EF4-FFF2-40B4-BE49-F238E27FC236}">
-                <a16:creationId xmlns:a16="http://schemas.microsoft.com/office/drawing/2014/main" id="{06D5B1AE-1F8B-4C07-B0E8-1BCF2BF029DE}"/>
+                <a16:creationId xmlns:a16="http://schemas.microsoft.com/office/drawing/2014/main" id="{03561DA6-569D-4B8A-8707-2DDAF7E00A24}"/>
               </a:ext>
             </a:extLst>
           </p:cNvPr>
@@ -25969,7 +25964,7 @@
           <p:cNvPr id="3" name="Content Placeholder 2">
             <a:extLst>
               <a:ext uri="{FF2B5EF4-FFF2-40B4-BE49-F238E27FC236}">
-                <a16:creationId xmlns:a16="http://schemas.microsoft.com/office/drawing/2014/main" id="{B8137DE8-E2FE-4F7B-B673-0AC0333A6DB6}"/>
+                <a16:creationId xmlns:a16="http://schemas.microsoft.com/office/drawing/2014/main" id="{7B954D99-B71A-4BDA-938A-21176BF22348}"/>
               </a:ext>
             </a:extLst>
           </p:cNvPr>
@@ -25987,141 +25982,44 @@
           <a:p>
             <a:r>
               <a:rPr lang="en-US" dirty="0"/>
-              <a:t>Constant folding</a:t>
+              <a:t>Strength reduction</a:t>
             </a:r>
           </a:p>
           <a:p>
             <a:pPr lvl="1"/>
             <a:r>
               <a:rPr lang="en-US" dirty="0"/>
-              <a:t>2 * 3.14 = 6.28</a:t>
+              <a:t>x</a:t>
+            </a:r>
+            <a:r>
+              <a:rPr lang="en-US" baseline="30000" dirty="0"/>
+              <a:t>2</a:t>
+            </a:r>
+            <a:r>
+              <a:rPr lang="en-US" dirty="0"/>
+              <a:t> = x * x</a:t>
             </a:r>
           </a:p>
           <a:p>
             <a:pPr lvl="1"/>
-            <a:endParaRPr lang="en-US" dirty="0"/>
-          </a:p>
-          <a:p>
             <a:r>
               <a:rPr lang="en-US" dirty="0"/>
-              <a:t>Constant folding is tricky for cross-compilation</a:t>
+              <a:t>2 * x = x + x</a:t>
             </a:r>
           </a:p>
           <a:p>
             <a:pPr lvl="1"/>
             <a:r>
               <a:rPr lang="en-US" dirty="0"/>
-              <a:t>The result of floating-point arithmetic may vary across architecture</a:t>
-            </a:r>
-          </a:p>
-          <a:p>
-            <a:pPr marL="457200" lvl="1" indent="0">
-              <a:buNone/>
-            </a:pPr>
-            <a:endParaRPr lang="en-US" dirty="0"/>
-          </a:p>
-          <a:p>
-            <a:pPr marL="457200" lvl="1" indent="0">
-              <a:buNone/>
-            </a:pPr>
-            <a:endParaRPr lang="en-US" dirty="0"/>
-          </a:p>
-          <a:p>
-            <a:pPr marL="457200" lvl="1" indent="0">
-              <a:buNone/>
-            </a:pPr>
-            <a:endParaRPr lang="en-US" dirty="0"/>
-          </a:p>
-          <a:p>
-            <a:pPr marL="457200" lvl="1" indent="0">
-              <a:buNone/>
-            </a:pPr>
-            <a:endParaRPr lang="en-IN" dirty="0"/>
-          </a:p>
-        </p:txBody>
-      </p:sp>
-      <p:sp>
-        <p:nvSpPr>
-          <p:cNvPr id="4" name="TextBox 3">
-            <a:extLst>
-              <a:ext uri="{FF2B5EF4-FFF2-40B4-BE49-F238E27FC236}">
-                <a16:creationId xmlns:a16="http://schemas.microsoft.com/office/drawing/2014/main" id="{9F829D01-EB9B-45B9-80F5-7DDFA288FC92}"/>
-              </a:ext>
-            </a:extLst>
-          </p:cNvPr>
-          <p:cNvSpPr txBox="1"/>
-          <p:nvPr/>
-        </p:nvSpPr>
-        <p:spPr>
-          <a:xfrm>
-            <a:off x="2377440" y="4876800"/>
-            <a:ext cx="4389120" cy="646331"/>
-          </a:xfrm>
-          <a:prstGeom prst="rect">
-            <a:avLst/>
-          </a:prstGeom>
-          <a:noFill/>
-        </p:spPr>
-        <p:txBody>
-          <a:bodyPr wrap="square" rtlCol="0">
-            <a:spAutoFit/>
-          </a:bodyPr>
-          <a:lstStyle/>
-          <a:p>
-            <a:r>
-              <a:rPr lang="en-US" dirty="0"/>
-              <a:t>Architeure-1               Architecure-2</a:t>
-            </a:r>
-          </a:p>
-          <a:p>
-            <a:r>
-              <a:rPr lang="en-US" dirty="0"/>
-              <a:t>2*3.14 = 6.28             2*3.14 = 6.2</a:t>
-            </a:r>
-            <a:endParaRPr lang="en-IN" dirty="0"/>
-          </a:p>
-        </p:txBody>
-      </p:sp>
-      <p:sp>
-        <p:nvSpPr>
-          <p:cNvPr id="5" name="TextBox 4">
-            <a:extLst>
-              <a:ext uri="{FF2B5EF4-FFF2-40B4-BE49-F238E27FC236}">
-                <a16:creationId xmlns:a16="http://schemas.microsoft.com/office/drawing/2014/main" id="{FF4E58ED-EC43-47BC-BF90-A302E9C8BAC1}"/>
-              </a:ext>
-            </a:extLst>
-          </p:cNvPr>
-          <p:cNvSpPr txBox="1"/>
-          <p:nvPr/>
-        </p:nvSpPr>
-        <p:spPr>
-          <a:xfrm>
-            <a:off x="1595120" y="5679440"/>
-            <a:ext cx="7162800" cy="923330"/>
-          </a:xfrm>
-          <a:prstGeom prst="rect">
-            <a:avLst/>
-          </a:prstGeom>
-          <a:noFill/>
-        </p:spPr>
-        <p:txBody>
-          <a:bodyPr wrap="square" rtlCol="0">
-            <a:spAutoFit/>
-          </a:bodyPr>
-          <a:lstStyle/>
-          <a:p>
-            <a:r>
-              <a:rPr lang="en-US" dirty="0"/>
-              <a:t>If we are compiling the application for architecture-2 on architecture-1, then during constant folding, we need to compute the result that will be obtained on architecture-2.</a:t>
-            </a:r>
-            <a:endParaRPr lang="en-IN" dirty="0"/>
+              <a:t>x/2 = x * 0.5</a:t>
+            </a:r>
           </a:p>
         </p:txBody>
       </p:sp>
     </p:spTree>
     <p:extLst>
       <p:ext uri="{BB962C8B-B14F-4D97-AF65-F5344CB8AC3E}">
-        <p14:creationId xmlns:p14="http://schemas.microsoft.com/office/powerpoint/2010/main" val="2646759042"/>
+        <p14:creationId xmlns:p14="http://schemas.microsoft.com/office/powerpoint/2010/main" val="2955796025"/>
       </p:ext>
     </p:extLst>
   </p:cSld>
@@ -26278,7 +26176,7 @@
           <p:cNvPr id="2" name="Title 1">
             <a:extLst>
               <a:ext uri="{FF2B5EF4-FFF2-40B4-BE49-F238E27FC236}">
-                <a16:creationId xmlns:a16="http://schemas.microsoft.com/office/drawing/2014/main" id="{55E2EE73-1C4B-414B-8BE1-F3FF1F22D672}"/>
+                <a16:creationId xmlns:a16="http://schemas.microsoft.com/office/drawing/2014/main" id="{06D5B1AE-1F8B-4C07-B0E8-1BCF2BF029DE}"/>
               </a:ext>
             </a:extLst>
           </p:cNvPr>
@@ -26296,8 +26194,9 @@
           <a:p>
             <a:r>
               <a:rPr lang="en-US" dirty="0"/>
-              <a:t>Global optimizations</a:t>
-            </a:r>
+              <a:t>Local optimizations</a:t>
+            </a:r>
+            <a:endParaRPr lang="en-IN" dirty="0"/>
           </a:p>
         </p:txBody>
       </p:sp>
@@ -26306,7 +26205,7 @@
           <p:cNvPr id="3" name="Content Placeholder 2">
             <a:extLst>
               <a:ext uri="{FF2B5EF4-FFF2-40B4-BE49-F238E27FC236}">
-                <a16:creationId xmlns:a16="http://schemas.microsoft.com/office/drawing/2014/main" id="{8857849D-14BA-46E6-B551-80C9592B0CC6}"/>
+                <a16:creationId xmlns:a16="http://schemas.microsoft.com/office/drawing/2014/main" id="{B8137DE8-E2FE-4F7B-B673-0AC0333A6DB6}"/>
               </a:ext>
             </a:extLst>
           </p:cNvPr>
@@ -26324,15 +26223,141 @@
           <a:p>
             <a:r>
               <a:rPr lang="en-US" dirty="0"/>
-              <a:t>Global optimizations operate on the entire function</a:t>
-            </a:r>
+              <a:t>Constant folding</a:t>
+            </a:r>
+          </a:p>
+          <a:p>
+            <a:pPr lvl="1"/>
+            <a:r>
+              <a:rPr lang="en-US" dirty="0"/>
+              <a:t>2 * 3.14 = 6.28</a:t>
+            </a:r>
+          </a:p>
+          <a:p>
+            <a:pPr lvl="1"/>
+            <a:endParaRPr lang="en-US" dirty="0"/>
+          </a:p>
+          <a:p>
+            <a:r>
+              <a:rPr lang="en-US" dirty="0"/>
+              <a:t>Constant folding is tricky for cross-compilation</a:t>
+            </a:r>
+          </a:p>
+          <a:p>
+            <a:pPr lvl="1"/>
+            <a:r>
+              <a:rPr lang="en-US" dirty="0"/>
+              <a:t>The result of floating-point arithmetic may vary across architecture</a:t>
+            </a:r>
+          </a:p>
+          <a:p>
+            <a:pPr marL="457200" lvl="1" indent="0">
+              <a:buNone/>
+            </a:pPr>
+            <a:endParaRPr lang="en-US" dirty="0"/>
+          </a:p>
+          <a:p>
+            <a:pPr marL="457200" lvl="1" indent="0">
+              <a:buNone/>
+            </a:pPr>
+            <a:endParaRPr lang="en-US" dirty="0"/>
+          </a:p>
+          <a:p>
+            <a:pPr marL="457200" lvl="1" indent="0">
+              <a:buNone/>
+            </a:pPr>
+            <a:endParaRPr lang="en-US" dirty="0"/>
+          </a:p>
+          <a:p>
+            <a:pPr marL="457200" lvl="1" indent="0">
+              <a:buNone/>
+            </a:pPr>
+            <a:endParaRPr lang="en-IN" dirty="0"/>
+          </a:p>
+        </p:txBody>
+      </p:sp>
+      <p:sp>
+        <p:nvSpPr>
+          <p:cNvPr id="4" name="TextBox 3">
+            <a:extLst>
+              <a:ext uri="{FF2B5EF4-FFF2-40B4-BE49-F238E27FC236}">
+                <a16:creationId xmlns:a16="http://schemas.microsoft.com/office/drawing/2014/main" id="{9F829D01-EB9B-45B9-80F5-7DDFA288FC92}"/>
+              </a:ext>
+            </a:extLst>
+          </p:cNvPr>
+          <p:cNvSpPr txBox="1"/>
+          <p:nvPr/>
+        </p:nvSpPr>
+        <p:spPr>
+          <a:xfrm>
+            <a:off x="2377440" y="4876800"/>
+            <a:ext cx="4389120" cy="646331"/>
+          </a:xfrm>
+          <a:prstGeom prst="rect">
+            <a:avLst/>
+          </a:prstGeom>
+          <a:noFill/>
+        </p:spPr>
+        <p:txBody>
+          <a:bodyPr wrap="square" rtlCol="0">
+            <a:spAutoFit/>
+          </a:bodyPr>
+          <a:lstStyle/>
+          <a:p>
+            <a:r>
+              <a:rPr lang="en-US" dirty="0"/>
+              <a:t>Architeure-1               Architecure-2</a:t>
+            </a:r>
+          </a:p>
+          <a:p>
+            <a:r>
+              <a:rPr lang="en-US" dirty="0"/>
+              <a:t>2*3.14 = 6.28             2*3.14 = 6.2</a:t>
+            </a:r>
+            <a:endParaRPr lang="en-IN" dirty="0"/>
+          </a:p>
+        </p:txBody>
+      </p:sp>
+      <p:sp>
+        <p:nvSpPr>
+          <p:cNvPr id="5" name="TextBox 4">
+            <a:extLst>
+              <a:ext uri="{FF2B5EF4-FFF2-40B4-BE49-F238E27FC236}">
+                <a16:creationId xmlns:a16="http://schemas.microsoft.com/office/drawing/2014/main" id="{FF4E58ED-EC43-47BC-BF90-A302E9C8BAC1}"/>
+              </a:ext>
+            </a:extLst>
+          </p:cNvPr>
+          <p:cNvSpPr txBox="1"/>
+          <p:nvPr/>
+        </p:nvSpPr>
+        <p:spPr>
+          <a:xfrm>
+            <a:off x="1595120" y="5679440"/>
+            <a:ext cx="7162800" cy="923330"/>
+          </a:xfrm>
+          <a:prstGeom prst="rect">
+            <a:avLst/>
+          </a:prstGeom>
+          <a:noFill/>
+        </p:spPr>
+        <p:txBody>
+          <a:bodyPr wrap="square" rtlCol="0">
+            <a:spAutoFit/>
+          </a:bodyPr>
+          <a:lstStyle/>
+          <a:p>
+            <a:r>
+              <a:rPr lang="en-US" dirty="0"/>
+              <a:t>If we are compiling the application for architecture-2 on architecture-1, then during constant folding, we need to compute the result that will be obtained on architecture-2.</a:t>
+            </a:r>
+            <a:endParaRPr lang="en-IN" dirty="0"/>
           </a:p>
         </p:txBody>
       </p:sp>
     </p:spTree>
     <p:extLst>
       <p:ext uri="{BB962C8B-B14F-4D97-AF65-F5344CB8AC3E}">
-        <p14:creationId xmlns:p14="http://schemas.microsoft.com/office/powerpoint/2010/main" val="894821931"/>
+        <p14:creationId xmlns:p14="http://schemas.microsoft.com/office/powerpoint/2010/main" val="2646759042"/>
       </p:ext>
     </p:extLst>
   </p:cSld>
@@ -26364,7 +26389,7 @@
           <p:cNvPr id="2" name="Title 1">
             <a:extLst>
               <a:ext uri="{FF2B5EF4-FFF2-40B4-BE49-F238E27FC236}">
-                <a16:creationId xmlns:a16="http://schemas.microsoft.com/office/drawing/2014/main" id="{A87FB221-A3C5-4102-9C96-0202099F934A}"/>
+                <a16:creationId xmlns:a16="http://schemas.microsoft.com/office/drawing/2014/main" id="{55E2EE73-1C4B-414B-8BE1-F3FF1F22D672}"/>
               </a:ext>
             </a:extLst>
           </p:cNvPr>
@@ -26382,7 +26407,7 @@
           <a:p>
             <a:r>
               <a:rPr lang="en-US" dirty="0"/>
-              <a:t>Data-flow analysis</a:t>
+              <a:t>Global optimizations</a:t>
             </a:r>
           </a:p>
         </p:txBody>
@@ -26392,7 +26417,7 @@
           <p:cNvPr id="3" name="Content Placeholder 2">
             <a:extLst>
               <a:ext uri="{FF2B5EF4-FFF2-40B4-BE49-F238E27FC236}">
-                <a16:creationId xmlns:a16="http://schemas.microsoft.com/office/drawing/2014/main" id="{3823A2F5-004F-4B19-B85B-0FD62D333F85}"/>
+                <a16:creationId xmlns:a16="http://schemas.microsoft.com/office/drawing/2014/main" id="{8857849D-14BA-46E6-B551-80C9592B0CC6}"/>
               </a:ext>
             </a:extLst>
           </p:cNvPr>
@@ -26405,57 +26430,12 @@
         </p:nvSpPr>
         <p:spPr/>
         <p:txBody>
-          <a:bodyPr>
-            <a:normAutofit fontScale="77500" lnSpcReduction="20000"/>
-          </a:bodyPr>
+          <a:bodyPr/>
           <a:lstStyle/>
           <a:p>
             <a:r>
               <a:rPr lang="en-US" dirty="0"/>
-              <a:t>Data-flow analysis is a static analysis</a:t>
-            </a:r>
-          </a:p>
-          <a:p>
-            <a:endParaRPr lang="en-US" dirty="0"/>
-          </a:p>
-          <a:p>
-            <a:r>
-              <a:rPr lang="en-US" dirty="0"/>
-              <a:t>The goal of a data-flow analysis is to extract some facts of the program at a given program point</a:t>
-            </a:r>
-          </a:p>
-          <a:p>
-            <a:endParaRPr lang="en-US" dirty="0"/>
-          </a:p>
-          <a:p>
-            <a:r>
-              <a:rPr lang="en-US" dirty="0"/>
-              <a:t>Data-flow analysis considers all program paths that are possible during the execution</a:t>
-            </a:r>
-          </a:p>
-          <a:p>
-            <a:pPr lvl="1"/>
-            <a:r>
-              <a:rPr lang="en-US" dirty="0"/>
-              <a:t>Infinite number of possible execution paths</a:t>
-            </a:r>
-          </a:p>
-          <a:p>
-            <a:endParaRPr lang="en-US" dirty="0"/>
-          </a:p>
-          <a:p>
-            <a:r>
-              <a:rPr lang="en-US" dirty="0"/>
-              <a:t>Data-flow analysis summarizes all possible program states at a given program point with a finite set of facts</a:t>
-            </a:r>
-          </a:p>
-          <a:p>
-            <a:endParaRPr lang="en-US" dirty="0"/>
-          </a:p>
-          <a:p>
-            <a:r>
-              <a:rPr lang="en-US" dirty="0"/>
-              <a:t>Read Section-9.2 and 9.4 from the dragon book</a:t>
+              <a:t>Global optimizations operate on the entire function</a:t>
             </a:r>
           </a:p>
         </p:txBody>
@@ -26463,7 +26443,7 @@
     </p:spTree>
     <p:extLst>
       <p:ext uri="{BB962C8B-B14F-4D97-AF65-F5344CB8AC3E}">
-        <p14:creationId xmlns:p14="http://schemas.microsoft.com/office/powerpoint/2010/main" val="3172323109"/>
+        <p14:creationId xmlns:p14="http://schemas.microsoft.com/office/powerpoint/2010/main" val="894821931"/>
       </p:ext>
     </p:extLst>
   </p:cSld>
@@ -26495,6 +26475,137 @@
           <p:cNvPr id="2" name="Title 1">
             <a:extLst>
               <a:ext uri="{FF2B5EF4-FFF2-40B4-BE49-F238E27FC236}">
+                <a16:creationId xmlns:a16="http://schemas.microsoft.com/office/drawing/2014/main" id="{A87FB221-A3C5-4102-9C96-0202099F934A}"/>
+              </a:ext>
+            </a:extLst>
+          </p:cNvPr>
+          <p:cNvSpPr>
+            <a:spLocks noGrp="1"/>
+          </p:cNvSpPr>
+          <p:nvPr>
+            <p:ph type="title"/>
+          </p:nvPr>
+        </p:nvSpPr>
+        <p:spPr/>
+        <p:txBody>
+          <a:bodyPr/>
+          <a:lstStyle/>
+          <a:p>
+            <a:r>
+              <a:rPr lang="en-US" dirty="0"/>
+              <a:t>Data-flow analysis</a:t>
+            </a:r>
+          </a:p>
+        </p:txBody>
+      </p:sp>
+      <p:sp>
+        <p:nvSpPr>
+          <p:cNvPr id="3" name="Content Placeholder 2">
+            <a:extLst>
+              <a:ext uri="{FF2B5EF4-FFF2-40B4-BE49-F238E27FC236}">
+                <a16:creationId xmlns:a16="http://schemas.microsoft.com/office/drawing/2014/main" id="{3823A2F5-004F-4B19-B85B-0FD62D333F85}"/>
+              </a:ext>
+            </a:extLst>
+          </p:cNvPr>
+          <p:cNvSpPr>
+            <a:spLocks noGrp="1"/>
+          </p:cNvSpPr>
+          <p:nvPr>
+            <p:ph idx="1"/>
+          </p:nvPr>
+        </p:nvSpPr>
+        <p:spPr/>
+        <p:txBody>
+          <a:bodyPr>
+            <a:normAutofit fontScale="77500" lnSpcReduction="20000"/>
+          </a:bodyPr>
+          <a:lstStyle/>
+          <a:p>
+            <a:r>
+              <a:rPr lang="en-US" dirty="0"/>
+              <a:t>Data-flow analysis is a static analysis</a:t>
+            </a:r>
+          </a:p>
+          <a:p>
+            <a:endParaRPr lang="en-US" dirty="0"/>
+          </a:p>
+          <a:p>
+            <a:r>
+              <a:rPr lang="en-US" dirty="0"/>
+              <a:t>The goal of a data-flow analysis is to extract some facts of the program at a given program point</a:t>
+            </a:r>
+          </a:p>
+          <a:p>
+            <a:endParaRPr lang="en-US" dirty="0"/>
+          </a:p>
+          <a:p>
+            <a:r>
+              <a:rPr lang="en-US" dirty="0"/>
+              <a:t>Data-flow analysis considers all program paths that are possible during the execution</a:t>
+            </a:r>
+          </a:p>
+          <a:p>
+            <a:pPr lvl="1"/>
+            <a:r>
+              <a:rPr lang="en-US" dirty="0"/>
+              <a:t>Infinite number of possible execution paths</a:t>
+            </a:r>
+          </a:p>
+          <a:p>
+            <a:endParaRPr lang="en-US" dirty="0"/>
+          </a:p>
+          <a:p>
+            <a:r>
+              <a:rPr lang="en-US" dirty="0"/>
+              <a:t>Data-flow analysis summarizes all possible program states at a given program point with a finite set of facts</a:t>
+            </a:r>
+          </a:p>
+          <a:p>
+            <a:endParaRPr lang="en-US" dirty="0"/>
+          </a:p>
+          <a:p>
+            <a:r>
+              <a:rPr lang="en-US" dirty="0"/>
+              <a:t>Read Section-9.2 and 9.4 from the dragon book</a:t>
+            </a:r>
+          </a:p>
+        </p:txBody>
+      </p:sp>
+    </p:spTree>
+    <p:extLst>
+      <p:ext uri="{BB962C8B-B14F-4D97-AF65-F5344CB8AC3E}">
+        <p14:creationId xmlns:p14="http://schemas.microsoft.com/office/powerpoint/2010/main" val="3172323109"/>
+      </p:ext>
+    </p:extLst>
+  </p:cSld>
+  <p:clrMapOvr>
+    <a:masterClrMapping/>
+  </p:clrMapOvr>
+</p:sld>
+</file>
+
+<file path=ppt/slides/slide33.xml><?xml version="1.0" encoding="utf-8"?>
+<p:sld xmlns:a="http://schemas.openxmlformats.org/drawingml/2006/main" xmlns:r="http://schemas.openxmlformats.org/officeDocument/2006/relationships" xmlns:p="http://schemas.openxmlformats.org/presentationml/2006/main">
+  <p:cSld>
+    <p:spTree>
+      <p:nvGrpSpPr>
+        <p:cNvPr id="1" name=""/>
+        <p:cNvGrpSpPr/>
+        <p:nvPr/>
+      </p:nvGrpSpPr>
+      <p:grpSpPr>
+        <a:xfrm>
+          <a:off x="0" y="0"/>
+          <a:ext cx="0" cy="0"/>
+          <a:chOff x="0" y="0"/>
+          <a:chExt cx="0" cy="0"/>
+        </a:xfrm>
+      </p:grpSpPr>
+      <p:sp>
+        <p:nvSpPr>
+          <p:cNvPr id="2" name="Title 1">
+            <a:extLst>
+              <a:ext uri="{FF2B5EF4-FFF2-40B4-BE49-F238E27FC236}">
                 <a16:creationId xmlns:a16="http://schemas.microsoft.com/office/drawing/2014/main" id="{97D3EA2D-1344-4177-9FBB-8D7A153E81F8}"/>
               </a:ext>
             </a:extLst>
@@ -26654,7 +26765,7 @@
 </p:sld>
 </file>
 
-<file path=ppt/slides/slide33.xml><?xml version="1.0" encoding="utf-8"?>
+<file path=ppt/slides/slide34.xml><?xml version="1.0" encoding="utf-8"?>
 <p:sld xmlns:a="http://schemas.openxmlformats.org/drawingml/2006/main" xmlns:r="http://schemas.openxmlformats.org/officeDocument/2006/relationships" xmlns:p="http://schemas.openxmlformats.org/presentationml/2006/main">
   <p:cSld>
     <p:spTree>
@@ -27033,7 +27144,7 @@
 </p:sld>
 </file>
 
-<file path=ppt/slides/slide34.xml><?xml version="1.0" encoding="utf-8"?>
+<file path=ppt/slides/slide35.xml><?xml version="1.0" encoding="utf-8"?>
 <p:sld xmlns:a="http://schemas.openxmlformats.org/drawingml/2006/main" xmlns:r="http://schemas.openxmlformats.org/officeDocument/2006/relationships" xmlns:p="http://schemas.openxmlformats.org/presentationml/2006/main">
   <p:cSld>
     <p:spTree>
@@ -27342,21 +27453,6 @@
             <a:r>
               <a:rPr lang="en-US" dirty="0"/>
               <a:t>z = c * c</a:t>
-            </a:r>
-          </a:p>
-          <a:p>
-            <a:pPr algn="ctr"/>
-            <a:r>
-              <a:rPr lang="en-US" dirty="0"/>
-              <a:t>add a </a:t>
-            </a:r>
-            <a:r>
-              <a:rPr lang="en-US" dirty="0" err="1"/>
-              <a:t>goto</a:t>
-            </a:r>
-            <a:r>
-              <a:rPr lang="en-US" dirty="0"/>
-              <a:t> here</a:t>
             </a:r>
           </a:p>
         </p:txBody>
@@ -28142,7 +28238,7 @@
 </p:sld>
 </file>
 
-<file path=ppt/slides/slide35.xml><?xml version="1.0" encoding="utf-8"?>
+<file path=ppt/slides/slide36.xml><?xml version="1.0" encoding="utf-8"?>
 <p:sld xmlns:a="http://schemas.openxmlformats.org/drawingml/2006/main" xmlns:r="http://schemas.openxmlformats.org/officeDocument/2006/relationships" xmlns:p="http://schemas.openxmlformats.org/presentationml/2006/main">
   <p:cSld>
     <p:spTree>
@@ -28249,7 +28345,7 @@
 </p:sld>
 </file>
 
-<file path=ppt/slides/slide36.xml><?xml version="1.0" encoding="utf-8"?>
+<file path=ppt/slides/slide37.xml><?xml version="1.0" encoding="utf-8"?>
 <p:sld xmlns:a="http://schemas.openxmlformats.org/drawingml/2006/main" xmlns:r="http://schemas.openxmlformats.org/officeDocument/2006/relationships" xmlns:p="http://schemas.openxmlformats.org/presentationml/2006/main">
   <p:cSld>
     <p:spTree>
@@ -28558,21 +28654,6 @@
             <a:r>
               <a:rPr lang="en-US" dirty="0"/>
               <a:t>z = c * c</a:t>
-            </a:r>
-          </a:p>
-          <a:p>
-            <a:pPr algn="ctr"/>
-            <a:r>
-              <a:rPr lang="en-US" dirty="0"/>
-              <a:t>add a </a:t>
-            </a:r>
-            <a:r>
-              <a:rPr lang="en-US" dirty="0" err="1"/>
-              <a:t>goto</a:t>
-            </a:r>
-            <a:r>
-              <a:rPr lang="en-US" dirty="0"/>
-              <a:t> here</a:t>
             </a:r>
           </a:p>
         </p:txBody>
@@ -29169,7 +29250,7 @@
 </p:sld>
 </file>
 
-<file path=ppt/slides/slide37.xml><?xml version="1.0" encoding="utf-8"?>
+<file path=ppt/slides/slide38.xml><?xml version="1.0" encoding="utf-8"?>
 <p:sld xmlns:a="http://schemas.openxmlformats.org/drawingml/2006/main" xmlns:r="http://schemas.openxmlformats.org/officeDocument/2006/relationships" xmlns:p="http://schemas.openxmlformats.org/presentationml/2006/main">
   <p:cSld>
     <p:spTree>
@@ -29331,7 +29412,7 @@
 </p:sld>
 </file>
 
-<file path=ppt/slides/slide38.xml><?xml version="1.0" encoding="utf-8"?>
+<file path=ppt/slides/slide39.xml><?xml version="1.0" encoding="utf-8"?>
 <p:sld xmlns:a="http://schemas.openxmlformats.org/drawingml/2006/main" xmlns:r="http://schemas.openxmlformats.org/officeDocument/2006/relationships" xmlns:p="http://schemas.openxmlformats.org/presentationml/2006/main">
   <p:cSld>
     <p:spTree>
@@ -30539,117 +30620,6 @@
 </p:sld>
 </file>
 
-<file path=ppt/slides/slide39.xml><?xml version="1.0" encoding="utf-8"?>
-<p:sld xmlns:a="http://schemas.openxmlformats.org/drawingml/2006/main" xmlns:r="http://schemas.openxmlformats.org/officeDocument/2006/relationships" xmlns:p="http://schemas.openxmlformats.org/presentationml/2006/main">
-  <p:cSld>
-    <p:spTree>
-      <p:nvGrpSpPr>
-        <p:cNvPr id="1" name=""/>
-        <p:cNvGrpSpPr/>
-        <p:nvPr/>
-      </p:nvGrpSpPr>
-      <p:grpSpPr>
-        <a:xfrm>
-          <a:off x="0" y="0"/>
-          <a:ext cx="0" cy="0"/>
-          <a:chOff x="0" y="0"/>
-          <a:chExt cx="0" cy="0"/>
-        </a:xfrm>
-      </p:grpSpPr>
-      <p:sp>
-        <p:nvSpPr>
-          <p:cNvPr id="2" name="Title 1">
-            <a:extLst>
-              <a:ext uri="{FF2B5EF4-FFF2-40B4-BE49-F238E27FC236}">
-                <a16:creationId xmlns:a16="http://schemas.microsoft.com/office/drawing/2014/main" id="{FCBDEC68-D0B3-4569-9F89-02C83E4F558B}"/>
-              </a:ext>
-            </a:extLst>
-          </p:cNvPr>
-          <p:cNvSpPr>
-            <a:spLocks noGrp="1"/>
-          </p:cNvSpPr>
-          <p:nvPr>
-            <p:ph type="title"/>
-          </p:nvPr>
-        </p:nvSpPr>
-        <p:spPr/>
-        <p:txBody>
-          <a:bodyPr/>
-          <a:lstStyle/>
-          <a:p>
-            <a:r>
-              <a:rPr lang="en-US" dirty="0"/>
-              <a:t>Data-flow analysis</a:t>
-            </a:r>
-            <a:endParaRPr lang="en-IN" dirty="0"/>
-          </a:p>
-        </p:txBody>
-      </p:sp>
-      <p:sp>
-        <p:nvSpPr>
-          <p:cNvPr id="3" name="Content Placeholder 2">
-            <a:extLst>
-              <a:ext uri="{FF2B5EF4-FFF2-40B4-BE49-F238E27FC236}">
-                <a16:creationId xmlns:a16="http://schemas.microsoft.com/office/drawing/2014/main" id="{49931967-8F94-42E5-A607-B68B0AD2B177}"/>
-              </a:ext>
-            </a:extLst>
-          </p:cNvPr>
-          <p:cNvSpPr>
-            <a:spLocks noGrp="1"/>
-          </p:cNvSpPr>
-          <p:nvPr>
-            <p:ph idx="1"/>
-          </p:nvPr>
-        </p:nvSpPr>
-        <p:spPr/>
-        <p:txBody>
-          <a:bodyPr/>
-          <a:lstStyle/>
-          <a:p>
-            <a:r>
-              <a:rPr lang="en-US" dirty="0"/>
-              <a:t>Forward data-flow analysis</a:t>
-            </a:r>
-          </a:p>
-          <a:p>
-            <a:pPr lvl="1"/>
-            <a:r>
-              <a:rPr lang="en-US" dirty="0"/>
-              <a:t>In the forward data-flow analysis, we start from the ENRTY node and compute the facts (IN and OUT) in the forward direction (from ENTRY to EXIT)</a:t>
-            </a:r>
-          </a:p>
-          <a:p>
-            <a:pPr lvl="1"/>
-            <a:endParaRPr lang="en-US" dirty="0"/>
-          </a:p>
-          <a:p>
-            <a:r>
-              <a:rPr lang="en-US" dirty="0"/>
-              <a:t>Backward data-flow analysis</a:t>
-            </a:r>
-          </a:p>
-          <a:p>
-            <a:pPr lvl="1"/>
-            <a:r>
-              <a:rPr lang="en-US" dirty="0"/>
-              <a:t>In the backward data-flow analysis, we start from the EXIT node and compute the facts (IN and OUT) in the backward direction (from EXIT to ENRTY)</a:t>
-            </a:r>
-          </a:p>
-        </p:txBody>
-      </p:sp>
-    </p:spTree>
-    <p:extLst>
-      <p:ext uri="{BB962C8B-B14F-4D97-AF65-F5344CB8AC3E}">
-        <p14:creationId xmlns:p14="http://schemas.microsoft.com/office/powerpoint/2010/main" val="145589113"/>
-      </p:ext>
-    </p:extLst>
-  </p:cSld>
-  <p:clrMapOvr>
-    <a:masterClrMapping/>
-  </p:clrMapOvr>
-</p:sld>
-</file>
-
 <file path=ppt/slides/slide4.xml><?xml version="1.0" encoding="utf-8"?>
 <p:sld xmlns:a="http://schemas.openxmlformats.org/drawingml/2006/main" xmlns:r="http://schemas.openxmlformats.org/officeDocument/2006/relationships" xmlns:p="http://schemas.openxmlformats.org/presentationml/2006/main">
   <p:cSld>
@@ -30790,6 +30760,117 @@
           <p:cNvPr id="2" name="Title 1">
             <a:extLst>
               <a:ext uri="{FF2B5EF4-FFF2-40B4-BE49-F238E27FC236}">
+                <a16:creationId xmlns:a16="http://schemas.microsoft.com/office/drawing/2014/main" id="{FCBDEC68-D0B3-4569-9F89-02C83E4F558B}"/>
+              </a:ext>
+            </a:extLst>
+          </p:cNvPr>
+          <p:cNvSpPr>
+            <a:spLocks noGrp="1"/>
+          </p:cNvSpPr>
+          <p:nvPr>
+            <p:ph type="title"/>
+          </p:nvPr>
+        </p:nvSpPr>
+        <p:spPr/>
+        <p:txBody>
+          <a:bodyPr/>
+          <a:lstStyle/>
+          <a:p>
+            <a:r>
+              <a:rPr lang="en-US" dirty="0"/>
+              <a:t>Data-flow analysis</a:t>
+            </a:r>
+            <a:endParaRPr lang="en-IN" dirty="0"/>
+          </a:p>
+        </p:txBody>
+      </p:sp>
+      <p:sp>
+        <p:nvSpPr>
+          <p:cNvPr id="3" name="Content Placeholder 2">
+            <a:extLst>
+              <a:ext uri="{FF2B5EF4-FFF2-40B4-BE49-F238E27FC236}">
+                <a16:creationId xmlns:a16="http://schemas.microsoft.com/office/drawing/2014/main" id="{49931967-8F94-42E5-A607-B68B0AD2B177}"/>
+              </a:ext>
+            </a:extLst>
+          </p:cNvPr>
+          <p:cNvSpPr>
+            <a:spLocks noGrp="1"/>
+          </p:cNvSpPr>
+          <p:nvPr>
+            <p:ph idx="1"/>
+          </p:nvPr>
+        </p:nvSpPr>
+        <p:spPr/>
+        <p:txBody>
+          <a:bodyPr/>
+          <a:lstStyle/>
+          <a:p>
+            <a:r>
+              <a:rPr lang="en-US" dirty="0"/>
+              <a:t>Forward data-flow analysis</a:t>
+            </a:r>
+          </a:p>
+          <a:p>
+            <a:pPr lvl="1"/>
+            <a:r>
+              <a:rPr lang="en-US" dirty="0"/>
+              <a:t>In the forward data-flow analysis, we start from the ENRTY node and compute the facts (IN and OUT) in the forward direction (from ENTRY to EXIT)</a:t>
+            </a:r>
+          </a:p>
+          <a:p>
+            <a:pPr lvl="1"/>
+            <a:endParaRPr lang="en-US" dirty="0"/>
+          </a:p>
+          <a:p>
+            <a:r>
+              <a:rPr lang="en-US" dirty="0"/>
+              <a:t>Backward data-flow analysis</a:t>
+            </a:r>
+          </a:p>
+          <a:p>
+            <a:pPr lvl="1"/>
+            <a:r>
+              <a:rPr lang="en-US" dirty="0"/>
+              <a:t>In the backward data-flow analysis, we start from the EXIT node and compute the facts (IN and OUT) in the backward direction (from EXIT to ENRTY)</a:t>
+            </a:r>
+          </a:p>
+        </p:txBody>
+      </p:sp>
+    </p:spTree>
+    <p:extLst>
+      <p:ext uri="{BB962C8B-B14F-4D97-AF65-F5344CB8AC3E}">
+        <p14:creationId xmlns:p14="http://schemas.microsoft.com/office/powerpoint/2010/main" val="145589113"/>
+      </p:ext>
+    </p:extLst>
+  </p:cSld>
+  <p:clrMapOvr>
+    <a:masterClrMapping/>
+  </p:clrMapOvr>
+</p:sld>
+</file>
+
+<file path=ppt/slides/slide41.xml><?xml version="1.0" encoding="utf-8"?>
+<p:sld xmlns:a="http://schemas.openxmlformats.org/drawingml/2006/main" xmlns:r="http://schemas.openxmlformats.org/officeDocument/2006/relationships" xmlns:p="http://schemas.openxmlformats.org/presentationml/2006/main">
+  <p:cSld>
+    <p:spTree>
+      <p:nvGrpSpPr>
+        <p:cNvPr id="1" name=""/>
+        <p:cNvGrpSpPr/>
+        <p:nvPr/>
+      </p:nvGrpSpPr>
+      <p:grpSpPr>
+        <a:xfrm>
+          <a:off x="0" y="0"/>
+          <a:ext cx="0" cy="0"/>
+          <a:chOff x="0" y="0"/>
+          <a:chExt cx="0" cy="0"/>
+        </a:xfrm>
+      </p:grpSpPr>
+      <p:sp>
+        <p:nvSpPr>
+          <p:cNvPr id="2" name="Title 1">
+            <a:extLst>
+              <a:ext uri="{FF2B5EF4-FFF2-40B4-BE49-F238E27FC236}">
                 <a16:creationId xmlns:a16="http://schemas.microsoft.com/office/drawing/2014/main" id="{97DBC66A-3153-47ED-BFBE-C6E548F20B42}"/>
               </a:ext>
             </a:extLst>
@@ -30856,7 +30937,7 @@
 </p:sld>
 </file>
 
-<file path=ppt/slides/slide41.xml><?xml version="1.0" encoding="utf-8"?>
+<file path=ppt/slides/slide42.xml><?xml version="1.0" encoding="utf-8"?>
 <p:sld xmlns:a="http://schemas.openxmlformats.org/drawingml/2006/main" xmlns:r="http://schemas.openxmlformats.org/officeDocument/2006/relationships" xmlns:p="http://schemas.openxmlformats.org/presentationml/2006/main">
   <p:cSld>
     <p:spTree>
@@ -31162,7 +31243,7 @@
 </p:sld>
 </file>
 
-<file path=ppt/slides/slide42.xml><?xml version="1.0" encoding="utf-8"?>
+<file path=ppt/slides/slide43.xml><?xml version="1.0" encoding="utf-8"?>
 <p:sld xmlns:a="http://schemas.openxmlformats.org/drawingml/2006/main" xmlns:r="http://schemas.openxmlformats.org/officeDocument/2006/relationships" xmlns:p="http://schemas.openxmlformats.org/presentationml/2006/main">
   <p:cSld>
     <p:spTree>
@@ -32329,7 +32410,7 @@
 </p:sld>
 </file>
 
-<file path=ppt/slides/slide43.xml><?xml version="1.0" encoding="utf-8"?>
+<file path=ppt/slides/slide44.xml><?xml version="1.0" encoding="utf-8"?>
 <p:sld xmlns:a="http://schemas.openxmlformats.org/drawingml/2006/main" xmlns:r="http://schemas.openxmlformats.org/officeDocument/2006/relationships" xmlns:p="http://schemas.openxmlformats.org/presentationml/2006/main">
   <p:cSld>
     <p:spTree>
@@ -32837,7 +32918,7 @@
 </p:sld>
 </file>
 
-<file path=ppt/slides/slide44.xml><?xml version="1.0" encoding="utf-8"?>
+<file path=ppt/slides/slide45.xml><?xml version="1.0" encoding="utf-8"?>
 <p:sld xmlns:a="http://schemas.openxmlformats.org/drawingml/2006/main" xmlns:r="http://schemas.openxmlformats.org/officeDocument/2006/relationships" xmlns:p="http://schemas.openxmlformats.org/presentationml/2006/main">
   <p:cSld>
     <p:spTree>
@@ -33941,7 +34022,7 @@
 </p:sld>
 </file>
 
-<file path=ppt/slides/slide45.xml><?xml version="1.0" encoding="utf-8"?>
+<file path=ppt/slides/slide46.xml><?xml version="1.0" encoding="utf-8"?>
 <p:sld xmlns:a="http://schemas.openxmlformats.org/drawingml/2006/main" xmlns:r="http://schemas.openxmlformats.org/officeDocument/2006/relationships" xmlns:p="http://schemas.openxmlformats.org/presentationml/2006/main">
   <p:cSld>
     <p:spTree>
@@ -34252,7 +34333,7 @@
 </p:sld>
 </file>
 
-<file path=ppt/slides/slide46.xml><?xml version="1.0" encoding="utf-8"?>
+<file path=ppt/slides/slide47.xml><?xml version="1.0" encoding="utf-8"?>
 <p:sld xmlns:a="http://schemas.openxmlformats.org/drawingml/2006/main" xmlns:r="http://schemas.openxmlformats.org/officeDocument/2006/relationships" xmlns:p="http://schemas.openxmlformats.org/presentationml/2006/main">
   <p:cSld>
     <p:spTree>
@@ -35157,7 +35238,7 @@
 </p:sld>
 </file>
 
-<file path=ppt/slides/slide47.xml><?xml version="1.0" encoding="utf-8"?>
+<file path=ppt/slides/slide48.xml><?xml version="1.0" encoding="utf-8"?>
 <p:sld xmlns:a="http://schemas.openxmlformats.org/drawingml/2006/main" xmlns:r="http://schemas.openxmlformats.org/officeDocument/2006/relationships" xmlns:p="http://schemas.openxmlformats.org/presentationml/2006/main">
   <p:cSld>
     <p:spTree>
@@ -35245,7 +35326,7 @@
 </p:sld>
 </file>
 
-<file path=ppt/slides/slide48.xml><?xml version="1.0" encoding="utf-8"?>
+<file path=ppt/slides/slide49.xml><?xml version="1.0" encoding="utf-8"?>
 <p:sld xmlns:a="http://schemas.openxmlformats.org/drawingml/2006/main" xmlns:r="http://schemas.openxmlformats.org/officeDocument/2006/relationships" xmlns:p="http://schemas.openxmlformats.org/presentationml/2006/main">
   <p:cSld>
     <p:spTree>
@@ -35926,7 +36007,7 @@
         <p:spPr>
           <a:xfrm>
             <a:off x="8676640" y="2387600"/>
-            <a:ext cx="3122384" cy="646331"/>
+            <a:ext cx="3122384" cy="1754326"/>
           </a:xfrm>
           <a:prstGeom prst="rect">
             <a:avLst/>
@@ -35941,7 +36022,7 @@
           <a:p>
             <a:r>
               <a:rPr lang="en-US" dirty="0"/>
-              <a:t>Can we compute everything in one iteration?</a:t>
+              <a:t>Initializing the OUTs of all basic blocks seems redundant if we can compute everything in one iteration. Can you think of a CFG that requires more than one iteration? </a:t>
             </a:r>
           </a:p>
         </p:txBody>
@@ -35959,7 +36040,246 @@
 </p:sld>
 </file>
 
-<file path=ppt/slides/slide49.xml><?xml version="1.0" encoding="utf-8"?>
+<file path=ppt/slides/slide5.xml><?xml version="1.0" encoding="utf-8"?>
+<p:sld xmlns:a="http://schemas.openxmlformats.org/drawingml/2006/main" xmlns:r="http://schemas.openxmlformats.org/officeDocument/2006/relationships" xmlns:p="http://schemas.openxmlformats.org/presentationml/2006/main">
+  <p:cSld>
+    <p:spTree>
+      <p:nvGrpSpPr>
+        <p:cNvPr id="1" name=""/>
+        <p:cNvGrpSpPr/>
+        <p:nvPr/>
+      </p:nvGrpSpPr>
+      <p:grpSpPr>
+        <a:xfrm>
+          <a:off x="0" y="0"/>
+          <a:ext cx="0" cy="0"/>
+          <a:chOff x="0" y="0"/>
+          <a:chExt cx="0" cy="0"/>
+        </a:xfrm>
+      </p:grpSpPr>
+      <p:sp>
+        <p:nvSpPr>
+          <p:cNvPr id="2" name="Title 1">
+            <a:extLst>
+              <a:ext uri="{FF2B5EF4-FFF2-40B4-BE49-F238E27FC236}">
+                <a16:creationId xmlns:a16="http://schemas.microsoft.com/office/drawing/2014/main" id="{FB4C25B5-D3F4-46B8-9E3D-16179D1300EE}"/>
+              </a:ext>
+            </a:extLst>
+          </p:cNvPr>
+          <p:cNvSpPr>
+            <a:spLocks noGrp="1"/>
+          </p:cNvSpPr>
+          <p:nvPr>
+            <p:ph type="title"/>
+          </p:nvPr>
+        </p:nvSpPr>
+        <p:spPr/>
+        <p:txBody>
+          <a:bodyPr/>
+          <a:lstStyle/>
+          <a:p>
+            <a:r>
+              <a:rPr lang="en-US" dirty="0"/>
+              <a:t>Temporaries</a:t>
+            </a:r>
+            <a:endParaRPr lang="en-IN" dirty="0"/>
+          </a:p>
+        </p:txBody>
+      </p:sp>
+      <p:sp>
+        <p:nvSpPr>
+          <p:cNvPr id="3" name="Content Placeholder 2">
+            <a:extLst>
+              <a:ext uri="{FF2B5EF4-FFF2-40B4-BE49-F238E27FC236}">
+                <a16:creationId xmlns:a16="http://schemas.microsoft.com/office/drawing/2014/main" id="{82422D3A-C0A9-49A4-BCC2-BCD46D244C56}"/>
+              </a:ext>
+            </a:extLst>
+          </p:cNvPr>
+          <p:cNvSpPr>
+            <a:spLocks noGrp="1"/>
+          </p:cNvSpPr>
+          <p:nvPr>
+            <p:ph idx="1"/>
+          </p:nvPr>
+        </p:nvSpPr>
+        <p:spPr/>
+        <p:txBody>
+          <a:bodyPr>
+            <a:normAutofit fontScale="92500" lnSpcReduction="20000"/>
+          </a:bodyPr>
+          <a:lstStyle/>
+          <a:p>
+            <a:pPr marL="0" indent="0">
+              <a:buNone/>
+            </a:pPr>
+            <a:r>
+              <a:rPr lang="en-US" dirty="0"/>
+              <a:t>f = f – (b + c + d + e)                                    add %</a:t>
+            </a:r>
+            <a:r>
+              <a:rPr lang="en-US" dirty="0" err="1"/>
+              <a:t>rax</a:t>
+            </a:r>
+            <a:r>
+              <a:rPr lang="en-US" dirty="0"/>
+              <a:t>, %</a:t>
+            </a:r>
+            <a:r>
+              <a:rPr lang="en-US" dirty="0" err="1"/>
+              <a:t>rcx</a:t>
+            </a:r>
+            <a:r>
+              <a:rPr lang="en-US" dirty="0"/>
+              <a:t> =&gt; </a:t>
+            </a:r>
+            <a:r>
+              <a:rPr lang="en-US" dirty="0" err="1"/>
+              <a:t>rcx</a:t>
+            </a:r>
+            <a:r>
+              <a:rPr lang="en-US" dirty="0"/>
+              <a:t> = </a:t>
+            </a:r>
+            <a:r>
+              <a:rPr lang="en-US" dirty="0" err="1"/>
+              <a:t>rcx</a:t>
+            </a:r>
+            <a:r>
+              <a:rPr lang="en-US" dirty="0"/>
+              <a:t> + </a:t>
+            </a:r>
+            <a:r>
+              <a:rPr lang="en-US" dirty="0" err="1"/>
+              <a:t>rax</a:t>
+            </a:r>
+            <a:endParaRPr lang="en-US" dirty="0"/>
+          </a:p>
+          <a:p>
+            <a:pPr marL="0" indent="0">
+              <a:buNone/>
+            </a:pPr>
+            <a:r>
+              <a:rPr lang="en-US" dirty="0"/>
+              <a:t>                                                                       mov %</a:t>
+            </a:r>
+            <a:r>
+              <a:rPr lang="en-US" dirty="0" err="1"/>
+              <a:t>rax</a:t>
+            </a:r>
+            <a:r>
+              <a:rPr lang="en-US" dirty="0"/>
+              <a:t>, %</a:t>
+            </a:r>
+            <a:r>
+              <a:rPr lang="en-US" dirty="0" err="1"/>
+              <a:t>rcx</a:t>
+            </a:r>
+            <a:r>
+              <a:rPr lang="en-US" dirty="0"/>
+              <a:t> =&gt; </a:t>
+            </a:r>
+            <a:r>
+              <a:rPr lang="en-US" dirty="0" err="1"/>
+              <a:t>rcx</a:t>
+            </a:r>
+            <a:r>
+              <a:rPr lang="en-US" dirty="0"/>
+              <a:t> = </a:t>
+            </a:r>
+            <a:r>
+              <a:rPr lang="en-US" dirty="0" err="1"/>
+              <a:t>rax</a:t>
+            </a:r>
+            <a:endParaRPr lang="en-US" dirty="0"/>
+          </a:p>
+          <a:p>
+            <a:pPr marL="0" indent="0">
+              <a:buNone/>
+            </a:pPr>
+            <a:endParaRPr lang="en-IN" dirty="0"/>
+          </a:p>
+          <a:p>
+            <a:pPr marL="0" indent="0">
+              <a:buNone/>
+            </a:pPr>
+            <a:r>
+              <a:rPr lang="en-IN" dirty="0"/>
+              <a:t>We need a temporary register to store the intermediate results of additions because we can add at most two variables using the add instruction</a:t>
+            </a:r>
+          </a:p>
+          <a:p>
+            <a:pPr marL="0" indent="0">
+              <a:buNone/>
+            </a:pPr>
+            <a:endParaRPr lang="en-IN" dirty="0"/>
+          </a:p>
+          <a:p>
+            <a:pPr marL="0" indent="0">
+              <a:buNone/>
+            </a:pPr>
+            <a:r>
+              <a:rPr lang="en-IN" dirty="0"/>
+              <a:t>t = b</a:t>
+            </a:r>
+          </a:p>
+          <a:p>
+            <a:pPr marL="0" indent="0">
+              <a:buNone/>
+            </a:pPr>
+            <a:r>
+              <a:rPr lang="en-IN" dirty="0"/>
+              <a:t>t = t + c</a:t>
+            </a:r>
+          </a:p>
+          <a:p>
+            <a:pPr marL="0" indent="0">
+              <a:buNone/>
+            </a:pPr>
+            <a:r>
+              <a:rPr lang="en-IN" dirty="0"/>
+              <a:t>t = t + d</a:t>
+            </a:r>
+          </a:p>
+          <a:p>
+            <a:pPr marL="0" indent="0">
+              <a:buNone/>
+            </a:pPr>
+            <a:r>
+              <a:rPr lang="en-IN" dirty="0"/>
+              <a:t>t = t + e</a:t>
+            </a:r>
+          </a:p>
+          <a:p>
+            <a:pPr marL="0" indent="0">
+              <a:buNone/>
+            </a:pPr>
+            <a:r>
+              <a:rPr lang="en-IN" dirty="0"/>
+              <a:t>f = f - t</a:t>
+            </a:r>
+          </a:p>
+          <a:p>
+            <a:pPr marL="0" indent="0">
+              <a:buNone/>
+            </a:pPr>
+            <a:endParaRPr lang="en-IN" dirty="0"/>
+          </a:p>
+        </p:txBody>
+      </p:sp>
+    </p:spTree>
+    <p:extLst>
+      <p:ext uri="{BB962C8B-B14F-4D97-AF65-F5344CB8AC3E}">
+        <p14:creationId xmlns:p14="http://schemas.microsoft.com/office/powerpoint/2010/main" val="1661523162"/>
+      </p:ext>
+    </p:extLst>
+  </p:cSld>
+  <p:clrMapOvr>
+    <a:masterClrMapping/>
+  </p:clrMapOvr>
+</p:sld>
+</file>
+
+<file path=ppt/slides/slide50.xml><?xml version="1.0" encoding="utf-8"?>
 <p:sld xmlns:a="http://schemas.openxmlformats.org/drawingml/2006/main" xmlns:r="http://schemas.openxmlformats.org/officeDocument/2006/relationships" xmlns:p="http://schemas.openxmlformats.org/presentationml/2006/main">
   <p:cSld>
     <p:spTree>
@@ -36749,246 +37069,7 @@
 </p:sld>
 </file>
 
-<file path=ppt/slides/slide5.xml><?xml version="1.0" encoding="utf-8"?>
-<p:sld xmlns:a="http://schemas.openxmlformats.org/drawingml/2006/main" xmlns:r="http://schemas.openxmlformats.org/officeDocument/2006/relationships" xmlns:p="http://schemas.openxmlformats.org/presentationml/2006/main">
-  <p:cSld>
-    <p:spTree>
-      <p:nvGrpSpPr>
-        <p:cNvPr id="1" name=""/>
-        <p:cNvGrpSpPr/>
-        <p:nvPr/>
-      </p:nvGrpSpPr>
-      <p:grpSpPr>
-        <a:xfrm>
-          <a:off x="0" y="0"/>
-          <a:ext cx="0" cy="0"/>
-          <a:chOff x="0" y="0"/>
-          <a:chExt cx="0" cy="0"/>
-        </a:xfrm>
-      </p:grpSpPr>
-      <p:sp>
-        <p:nvSpPr>
-          <p:cNvPr id="2" name="Title 1">
-            <a:extLst>
-              <a:ext uri="{FF2B5EF4-FFF2-40B4-BE49-F238E27FC236}">
-                <a16:creationId xmlns:a16="http://schemas.microsoft.com/office/drawing/2014/main" id="{FB4C25B5-D3F4-46B8-9E3D-16179D1300EE}"/>
-              </a:ext>
-            </a:extLst>
-          </p:cNvPr>
-          <p:cNvSpPr>
-            <a:spLocks noGrp="1"/>
-          </p:cNvSpPr>
-          <p:nvPr>
-            <p:ph type="title"/>
-          </p:nvPr>
-        </p:nvSpPr>
-        <p:spPr/>
-        <p:txBody>
-          <a:bodyPr/>
-          <a:lstStyle/>
-          <a:p>
-            <a:r>
-              <a:rPr lang="en-US" dirty="0"/>
-              <a:t>Temporaries</a:t>
-            </a:r>
-            <a:endParaRPr lang="en-IN" dirty="0"/>
-          </a:p>
-        </p:txBody>
-      </p:sp>
-      <p:sp>
-        <p:nvSpPr>
-          <p:cNvPr id="3" name="Content Placeholder 2">
-            <a:extLst>
-              <a:ext uri="{FF2B5EF4-FFF2-40B4-BE49-F238E27FC236}">
-                <a16:creationId xmlns:a16="http://schemas.microsoft.com/office/drawing/2014/main" id="{82422D3A-C0A9-49A4-BCC2-BCD46D244C56}"/>
-              </a:ext>
-            </a:extLst>
-          </p:cNvPr>
-          <p:cNvSpPr>
-            <a:spLocks noGrp="1"/>
-          </p:cNvSpPr>
-          <p:nvPr>
-            <p:ph idx="1"/>
-          </p:nvPr>
-        </p:nvSpPr>
-        <p:spPr/>
-        <p:txBody>
-          <a:bodyPr>
-            <a:normAutofit fontScale="92500" lnSpcReduction="20000"/>
-          </a:bodyPr>
-          <a:lstStyle/>
-          <a:p>
-            <a:pPr marL="0" indent="0">
-              <a:buNone/>
-            </a:pPr>
-            <a:r>
-              <a:rPr lang="en-US" dirty="0"/>
-              <a:t>f = f – (b + c + d + e)                                    add %</a:t>
-            </a:r>
-            <a:r>
-              <a:rPr lang="en-US" dirty="0" err="1"/>
-              <a:t>rax</a:t>
-            </a:r>
-            <a:r>
-              <a:rPr lang="en-US" dirty="0"/>
-              <a:t>, %</a:t>
-            </a:r>
-            <a:r>
-              <a:rPr lang="en-US" dirty="0" err="1"/>
-              <a:t>rcx</a:t>
-            </a:r>
-            <a:r>
-              <a:rPr lang="en-US" dirty="0"/>
-              <a:t> =&gt; </a:t>
-            </a:r>
-            <a:r>
-              <a:rPr lang="en-US" dirty="0" err="1"/>
-              <a:t>rcx</a:t>
-            </a:r>
-            <a:r>
-              <a:rPr lang="en-US" dirty="0"/>
-              <a:t> = </a:t>
-            </a:r>
-            <a:r>
-              <a:rPr lang="en-US" dirty="0" err="1"/>
-              <a:t>rcx</a:t>
-            </a:r>
-            <a:r>
-              <a:rPr lang="en-US" dirty="0"/>
-              <a:t> + </a:t>
-            </a:r>
-            <a:r>
-              <a:rPr lang="en-US" dirty="0" err="1"/>
-              <a:t>rax</a:t>
-            </a:r>
-            <a:endParaRPr lang="en-US" dirty="0"/>
-          </a:p>
-          <a:p>
-            <a:pPr marL="0" indent="0">
-              <a:buNone/>
-            </a:pPr>
-            <a:r>
-              <a:rPr lang="en-US" dirty="0"/>
-              <a:t>                                                                       mov %</a:t>
-            </a:r>
-            <a:r>
-              <a:rPr lang="en-US" dirty="0" err="1"/>
-              <a:t>rax</a:t>
-            </a:r>
-            <a:r>
-              <a:rPr lang="en-US" dirty="0"/>
-              <a:t>, %</a:t>
-            </a:r>
-            <a:r>
-              <a:rPr lang="en-US" dirty="0" err="1"/>
-              <a:t>rcx</a:t>
-            </a:r>
-            <a:r>
-              <a:rPr lang="en-US" dirty="0"/>
-              <a:t> =&gt; </a:t>
-            </a:r>
-            <a:r>
-              <a:rPr lang="en-US" dirty="0" err="1"/>
-              <a:t>rcx</a:t>
-            </a:r>
-            <a:r>
-              <a:rPr lang="en-US" dirty="0"/>
-              <a:t> = </a:t>
-            </a:r>
-            <a:r>
-              <a:rPr lang="en-US" dirty="0" err="1"/>
-              <a:t>rax</a:t>
-            </a:r>
-            <a:endParaRPr lang="en-US" dirty="0"/>
-          </a:p>
-          <a:p>
-            <a:pPr marL="0" indent="0">
-              <a:buNone/>
-            </a:pPr>
-            <a:endParaRPr lang="en-IN" dirty="0"/>
-          </a:p>
-          <a:p>
-            <a:pPr marL="0" indent="0">
-              <a:buNone/>
-            </a:pPr>
-            <a:r>
-              <a:rPr lang="en-IN" dirty="0"/>
-              <a:t>We need a temporary register to store the intermediate results of additions because we can add at most two variables using the add instruction</a:t>
-            </a:r>
-          </a:p>
-          <a:p>
-            <a:pPr marL="0" indent="0">
-              <a:buNone/>
-            </a:pPr>
-            <a:endParaRPr lang="en-IN" dirty="0"/>
-          </a:p>
-          <a:p>
-            <a:pPr marL="0" indent="0">
-              <a:buNone/>
-            </a:pPr>
-            <a:r>
-              <a:rPr lang="en-IN" dirty="0"/>
-              <a:t>t = b</a:t>
-            </a:r>
-          </a:p>
-          <a:p>
-            <a:pPr marL="0" indent="0">
-              <a:buNone/>
-            </a:pPr>
-            <a:r>
-              <a:rPr lang="en-IN" dirty="0"/>
-              <a:t>t = t + c</a:t>
-            </a:r>
-          </a:p>
-          <a:p>
-            <a:pPr marL="0" indent="0">
-              <a:buNone/>
-            </a:pPr>
-            <a:r>
-              <a:rPr lang="en-IN" dirty="0"/>
-              <a:t>t = t + d</a:t>
-            </a:r>
-          </a:p>
-          <a:p>
-            <a:pPr marL="0" indent="0">
-              <a:buNone/>
-            </a:pPr>
-            <a:r>
-              <a:rPr lang="en-IN" dirty="0"/>
-              <a:t>t = t + e</a:t>
-            </a:r>
-          </a:p>
-          <a:p>
-            <a:pPr marL="0" indent="0">
-              <a:buNone/>
-            </a:pPr>
-            <a:r>
-              <a:rPr lang="en-IN" dirty="0"/>
-              <a:t>f = f - t</a:t>
-            </a:r>
-          </a:p>
-          <a:p>
-            <a:pPr marL="0" indent="0">
-              <a:buNone/>
-            </a:pPr>
-            <a:endParaRPr lang="en-IN" dirty="0"/>
-          </a:p>
-        </p:txBody>
-      </p:sp>
-    </p:spTree>
-    <p:extLst>
-      <p:ext uri="{BB962C8B-B14F-4D97-AF65-F5344CB8AC3E}">
-        <p14:creationId xmlns:p14="http://schemas.microsoft.com/office/powerpoint/2010/main" val="1661523162"/>
-      </p:ext>
-    </p:extLst>
-  </p:cSld>
-  <p:clrMapOvr>
-    <a:masterClrMapping/>
-  </p:clrMapOvr>
-</p:sld>
-</file>
-
-<file path=ppt/slides/slide50.xml><?xml version="1.0" encoding="utf-8"?>
+<file path=ppt/slides/slide51.xml><?xml version="1.0" encoding="utf-8"?>
 <p:sld xmlns:a="http://schemas.openxmlformats.org/drawingml/2006/main" xmlns:r="http://schemas.openxmlformats.org/officeDocument/2006/relationships" xmlns:p="http://schemas.openxmlformats.org/presentationml/2006/main">
   <p:cSld>
     <p:spTree>
@@ -37198,7 +37279,7 @@
             <a:pPr algn="ctr"/>
             <a:r>
               <a:rPr lang="en-US" dirty="0"/>
-              <a:t>if (c &gt; 10 ) </a:t>
+              <a:t>if (c &gt; a ) </a:t>
             </a:r>
             <a:r>
               <a:rPr lang="en-US" dirty="0" err="1"/>
@@ -38177,7 +38258,7 @@
 </p:sld>
 </file>
 
-<file path=ppt/slides/slide51.xml><?xml version="1.0" encoding="utf-8"?>
+<file path=ppt/slides/slide52.xml><?xml version="1.0" encoding="utf-8"?>
 <p:sld xmlns:a="http://schemas.openxmlformats.org/drawingml/2006/main" xmlns:r="http://schemas.openxmlformats.org/officeDocument/2006/relationships" xmlns:p="http://schemas.openxmlformats.org/presentationml/2006/main">
   <p:cSld>
     <p:spTree>
@@ -38732,7 +38813,7 @@
 </p:sld>
 </file>
 
-<file path=ppt/slides/slide52.xml><?xml version="1.0" encoding="utf-8"?>
+<file path=ppt/slides/slide53.xml><?xml version="1.0" encoding="utf-8"?>
 <p:sld xmlns:a="http://schemas.openxmlformats.org/drawingml/2006/main" xmlns:r="http://schemas.openxmlformats.org/officeDocument/2006/relationships" xmlns:p="http://schemas.openxmlformats.org/presentationml/2006/main">
   <p:cSld>
     <p:spTree>
@@ -38827,7 +38908,7 @@
 </p:sld>
 </file>
 
-<file path=ppt/slides/slide53.xml><?xml version="1.0" encoding="utf-8"?>
+<file path=ppt/slides/slide54.xml><?xml version="1.0" encoding="utf-8"?>
 <p:sld xmlns:a="http://schemas.openxmlformats.org/drawingml/2006/main" xmlns:r="http://schemas.openxmlformats.org/officeDocument/2006/relationships" xmlns:p="http://schemas.openxmlformats.org/presentationml/2006/main">
   <p:cSld>
     <p:spTree>
@@ -39735,7 +39816,7 @@
 </p:sld>
 </file>
 
-<file path=ppt/slides/slide54.xml><?xml version="1.0" encoding="utf-8"?>
+<file path=ppt/slides/slide55.xml><?xml version="1.0" encoding="utf-8"?>
 <p:sld xmlns:a="http://schemas.openxmlformats.org/drawingml/2006/main" xmlns:r="http://schemas.openxmlformats.org/officeDocument/2006/relationships" xmlns:p="http://schemas.openxmlformats.org/presentationml/2006/main">
   <p:cSld>
     <p:spTree>
@@ -40810,7 +40891,7 @@
 </p:sld>
 </file>
 
-<file path=ppt/slides/slide55.xml><?xml version="1.0" encoding="utf-8"?>
+<file path=ppt/slides/slide56.xml><?xml version="1.0" encoding="utf-8"?>
 <p:sld xmlns:a="http://schemas.openxmlformats.org/drawingml/2006/main" xmlns:r="http://schemas.openxmlformats.org/officeDocument/2006/relationships" xmlns:p="http://schemas.openxmlformats.org/presentationml/2006/main">
   <p:cSld>
     <p:spTree>
@@ -41732,7 +41813,7 @@
 </p:sld>
 </file>
 
-<file path=ppt/slides/slide56.xml><?xml version="1.0" encoding="utf-8"?>
+<file path=ppt/slides/slide57.xml><?xml version="1.0" encoding="utf-8"?>
 <p:sld xmlns:a="http://schemas.openxmlformats.org/drawingml/2006/main" xmlns:r="http://schemas.openxmlformats.org/officeDocument/2006/relationships" xmlns:p="http://schemas.openxmlformats.org/presentationml/2006/main">
   <p:cSld>
     <p:spTree>
